--- a/lecons/F3/43_FORM4_LESSON39_Hydrological_Cycle.pptx
+++ b/lecons/F3/43_FORM4_LESSON39_Hydrological_Cycle.pptx
@@ -52,9 +52,12 @@
     <p:sldId id="300" r:id="rId46"/>
     <p:sldId id="301" r:id="rId47"/>
     <p:sldId id="302" r:id="rId48"/>
+    <p:sldId id="303" r:id="rId49"/>
+    <p:sldId id="304" r:id="rId50"/>
+    <p:sldId id="305" r:id="rId51"/>
   </p:sldIdLst>
   <p:notesMasterIdLst>
-    <p:notesMasterId r:id="rId49"/>
+    <p:notesMasterId r:id="rId52"/>
   </p:notesMasterIdLst>
   <p:sldSz cx="12192000" cy="6858000"/>
   <p:notesSz cx="6858000" cy="12192000"/>
@@ -636,7 +639,7 @@
           <a:p>
             <a:r>
               <a:rPr lang="en-US" dirty="0"/>
-              <a:t>Listen carefully to this situation from real life. In March, the Benue at Garoua is shallow with many sandbanks. In September, after months of rain, the river is wide and full. Mohamadou wonders where the water goes and comes from. Think about it, because I am going to ask you some questions.</a:t>
+              <a:t>Listen carefully to this situation from real life. In March, the Benue at Garoua is shallow with many sandbanks. In September, after months of rain, the river is wide and full. Mohamadou asks: "Where does all this water come from, and where does it go afterwards?" Think about it, because I am going to ask you some questions.</a:t>
             </a:r>
             <a:endParaRPr lang="en-US" dirty="0"/>
           </a:p>
@@ -812,7 +815,7 @@
           <a:p>
             <a:r>
               <a:rPr lang="en-US" dirty="0"/>
-              <a:t>Good. Mohamadou does not know where the water of the Benue comes from.</a:t>
+              <a:t>Good. Mohamadou does not know where the river water comes from and where it goes.</a:t>
             </a:r>
             <a:endParaRPr lang="en-US" dirty="0"/>
           </a:p>
@@ -900,7 +903,7 @@
           <a:p>
             <a:r>
               <a:rPr lang="en-US" dirty="0"/>
-              <a:t>Question 2: When is the river full? Think for a moment, then raise your hand to answer.</a:t>
+              <a:t>Question 2: When is the Benue full? Think for a moment, then raise your hand to answer.</a:t>
             </a:r>
             <a:endParaRPr lang="en-US" dirty="0"/>
           </a:p>
@@ -988,7 +991,7 @@
           <a:p>
             <a:r>
               <a:rPr lang="en-US" dirty="0"/>
-              <a:t>Good. In September.</a:t>
+              <a:t>Good. In September, after the rains.</a:t>
             </a:r>
             <a:endParaRPr lang="en-US" dirty="0"/>
           </a:p>
@@ -1076,7 +1079,7 @@
           <a:p>
             <a:r>
               <a:rPr lang="en-US" dirty="0"/>
-              <a:t>Question 3: Where does the water come from? Think for a moment, then raise your hand to answer.</a:t>
+              <a:t>Question 3: Where does the river water finally go? Think for a moment, then raise your hand to answer.</a:t>
             </a:r>
             <a:endParaRPr lang="en-US" dirty="0"/>
           </a:p>
@@ -1164,7 +1167,7 @@
           <a:p>
             <a:r>
               <a:rPr lang="en-US" dirty="0"/>
-              <a:t>Good. From the rain.</a:t>
+              <a:t>Good. To the sea (the Atlantic Ocean, through the Niger).</a:t>
             </a:r>
             <a:endParaRPr lang="en-US" dirty="0"/>
           </a:p>
@@ -1428,7 +1431,7 @@
           <a:p>
             <a:r>
               <a:rPr lang="en-US" dirty="0"/>
-              <a:t>Activity 1. Look carefully at this animation: animation: the journey of water. Watch the animation to the end; it will play again.</a:t>
+              <a:t>Activity 1. Look carefully at this animation: animation: the water cycle. Watch the animation to the end; it will play again.</a:t>
             </a:r>
             <a:endParaRPr lang="en-US" dirty="0"/>
           </a:p>
@@ -1604,7 +1607,7 @@
           <a:p>
             <a:r>
               <a:rPr lang="en-US" dirty="0"/>
-              <a:t>Here is the question for Activity 1: Name the four steps of the water cycle. Take one minute to think and write your answer in your rough notebook.</a:t>
+              <a:t>Here is the question for Activity 1: What happens to sea water heated by the Sun? Take one minute to think and write your answer in your rough notebook.</a:t>
             </a:r>
             <a:endParaRPr lang="en-US" dirty="0"/>
           </a:p>
@@ -1692,7 +1695,7 @@
           <a:p>
             <a:r>
               <a:rPr lang="en-US" dirty="0"/>
-              <a:t>Let us check the answer together. Evaporation, condensation, precipitation, runoff.</a:t>
+              <a:t>Let us check the answer together. It evaporates and becomes water vapour.</a:t>
             </a:r>
             <a:endParaRPr lang="en-US" dirty="0"/>
           </a:p>
@@ -1780,7 +1783,7 @@
           <a:p>
             <a:r>
               <a:rPr lang="en-US" dirty="0"/>
-              <a:t>Activity 2. Look carefully at this picture: a big river seen from space. Observe every detail before I ask the question.</a:t>
+              <a:t>Activity 2. Look carefully at this picture: a river after rain. Observe every detail before I ask the question.</a:t>
             </a:r>
             <a:endParaRPr lang="en-US" dirty="0"/>
           </a:p>
@@ -1956,7 +1959,7 @@
           <a:p>
             <a:r>
               <a:rPr lang="en-US" dirty="0"/>
-              <a:t>Let us check the answer together. It runs on the ground (runoff) or flows under the ground.</a:t>
+              <a:t>Let us check the answer together. It runs over the ground (runoff) or flows through the soil and rocks.</a:t>
             </a:r>
             <a:endParaRPr lang="en-US" dirty="0"/>
           </a:p>
@@ -2044,7 +2047,7 @@
           <a:p>
             <a:r>
               <a:rPr lang="en-US" dirty="0"/>
-              <a:t>Activity 3. Look carefully at this diagram: the drainage basin as a system. Observe every detail before I ask the question.</a:t>
+              <a:t>Activity 3. Look carefully at this diagram: inputs, stores and outputs. Observe every detail before I ask the question.</a:t>
             </a:r>
             <a:endParaRPr lang="en-US" dirty="0"/>
           </a:p>
@@ -2132,7 +2135,7 @@
           <a:p>
             <a:r>
               <a:rPr lang="en-US" dirty="0"/>
-              <a:t>Here is the question for Activity 3: What is the input? Name two outputs. Take one minute to think and write your answer in your rough notebook.</a:t>
+              <a:t>Here is the question for Activity 3: What is the input of water to a drainage basin? Take one minute to think and write your answer in your rough notebook.</a:t>
             </a:r>
             <a:endParaRPr lang="en-US" dirty="0"/>
           </a:p>
@@ -2220,7 +2223,7 @@
           <a:p>
             <a:r>
               <a:rPr lang="en-US" dirty="0"/>
-              <a:t>Let us check the answer together. Input: rain. Outputs: evaporation and river flow to the sea.</a:t>
+              <a:t>Let us check the answer together. Precipitation (rain).</a:t>
             </a:r>
             <a:endParaRPr lang="en-US" dirty="0"/>
           </a:p>
@@ -2308,7 +2311,7 @@
           <a:p>
             <a:r>
               <a:rPr lang="en-US" dirty="0"/>
-              <a:t>Now we are going to copy the board summary. Write the title and the headings neatly in your notebooks. I will give you enough time for each slide, so do not rush.</a:t>
+              <a:t>Here is the next question: Name one output. Take one minute to think and write your answer in your rough notebook.</a:t>
             </a:r>
             <a:endParaRPr lang="en-US" dirty="0"/>
           </a:p>
@@ -2396,7 +2399,7 @@
           <a:p>
             <a:r>
               <a:rPr lang="en-US" dirty="0"/>
-              <a:t>Let us copy Meaning. The hydrological cycle is defined as follows. On this slide we have Hydrological cycle. Write each point on a new line, with the key term first, and explain it in your own words when we revise.</a:t>
+              <a:t>Let us check the answer together. Evaporation (or river flow to the sea).</a:t>
             </a:r>
             <a:endParaRPr lang="en-US" dirty="0"/>
           </a:p>
@@ -2572,7 +2575,7 @@
           <a:p>
             <a:r>
               <a:rPr lang="en-US" dirty="0"/>
-              <a:t>Let us copy Components. The cycle has the following components. On this slide we have Evaporation and Condensation. Write each point on a new line, with the key term first, and explain it in your own words when we revise. When you finish, we go to the next slide.</a:t>
+              <a:t>Now we are going to copy the board summary. Write the title and the headings neatly in your notebooks. I will give you enough time for each slide, so do not rush.</a:t>
             </a:r>
             <a:endParaRPr lang="en-US" dirty="0"/>
           </a:p>
@@ -2660,7 +2663,7 @@
           <a:p>
             <a:r>
               <a:rPr lang="en-US" dirty="0"/>
-              <a:t>We continue with Components. On this slide we have Precipitation and Runoff and infiltration. Write each point on a new line, with the key term first, and explain it in your own words when we revise.</a:t>
+              <a:t>Let us copy the definitions. The key terms of this lesson are defined as follows. On this slide we have Hydrological cycle and Evaporation. Write each point on a new line, with the key term first, and explain it in your own words when we revise. When you finish, we go to the next slide.</a:t>
             </a:r>
             <a:endParaRPr lang="en-US" dirty="0"/>
           </a:p>
@@ -2748,7 +2751,7 @@
           <a:p>
             <a:r>
               <a:rPr lang="en-US" dirty="0"/>
-              <a:t>Now draw this illustration in your notebook: the hydrological cycle. Give it a title and label it clearly.</a:t>
+              <a:t>We continue with the definitions. On this slide we have Transpiration and Evapotranspiration. Write each point on a new line, with the key term first, and explain it in your own words when we revise.</a:t>
             </a:r>
             <a:endParaRPr lang="en-US" dirty="0"/>
           </a:p>
@@ -2836,7 +2839,7 @@
           <a:p>
             <a:r>
               <a:rPr lang="en-US" dirty="0"/>
-              <a:t>Let us copy The Hydrological Cycle as an Open System. A drainage basin works as an open system as follows. On this slide we have Input and Stores. Write each point on a new line, with the key term first, and explain it in your own words when we revise. When you finish, we go to the next slide.</a:t>
+              <a:t>Let us copy Meaning: Components of the Hydrological Cycle. The hydrological cycle has the following components. Copy the point on Evaporation and transpiration on the left, then draw the diagram on the right: the hydrological cycle. Give it a title and label it clearly.</a:t>
             </a:r>
             <a:endParaRPr lang="en-US" dirty="0"/>
           </a:p>
@@ -2924,7 +2927,7 @@
           <a:p>
             <a:r>
               <a:rPr lang="en-US" dirty="0"/>
-              <a:t>We continue with The Hydrological Cycle as an Open System. On this slide we have Outputs. Write each point on a new line, with the key term first, and explain it in your own words when we revise.</a:t>
+              <a:t>We continue with Meaning: Components of the Hydrological Cycle. On this slide we have Condensation, Precipitation and Infiltration and groundwater flow. Write each point on a new line, with the key term first, and explain it in your own words when we revise. When you finish, we go to the next slide.</a:t>
             </a:r>
             <a:endParaRPr lang="en-US" dirty="0"/>
           </a:p>
@@ -3012,7 +3015,7 @@
           <a:p>
             <a:r>
               <a:rPr lang="en-US" dirty="0"/>
-              <a:t>Now draw this illustration in your notebook: the drainage basin as an open system. Give it a title and label it clearly.</a:t>
+              <a:t>We continue with Meaning: Components of the Hydrological Cycle. On this slide we have Surface runoff. Write each point on a new line, with the key term first, and explain it in your own words when we revise.</a:t>
             </a:r>
             <a:endParaRPr lang="en-US" dirty="0"/>
           </a:p>
@@ -3100,7 +3103,7 @@
           <a:p>
             <a:r>
               <a:rPr lang="en-US" dirty="0"/>
-              <a:t>Now let us check what you have understood. Question 1: What is evaporation? Answer in your exercise book.</a:t>
+              <a:t>Let us copy The Flow Diagram as an Open System. The drainage basin works as an open system as follows. Copy the point on Inputs on the left, then draw the diagram on the right: the drainage basin as an open system. Give it a title and label it clearly.</a:t>
             </a:r>
             <a:endParaRPr lang="en-US" dirty="0"/>
           </a:p>
@@ -3188,7 +3191,7 @@
           <a:p>
             <a:r>
               <a:rPr lang="en-US" dirty="0"/>
-              <a:t>The expected answer is: water changing into vapour. If you got it right, well done.</a:t>
+              <a:t>We continue with The Flow Diagram as an Open System. On this slide we have Stores and Transfers. Write each point on a new line, with the key term first, and explain it in your own words when we revise. When you finish, we go to the next slide.</a:t>
             </a:r>
             <a:endParaRPr lang="en-US" dirty="0"/>
           </a:p>
@@ -3276,7 +3279,7 @@
           <a:p>
             <a:r>
               <a:rPr lang="en-US" dirty="0"/>
-              <a:t>Now let us check what you have understood. Question 2: Why is a drainage basin an open system? Answer in your exercise book.</a:t>
+              <a:t>We continue with The Flow Diagram as an Open System. On this slide we have Outputs and Open system. Write each point on a new line, with the key term first, and explain it in your own words when we revise.</a:t>
             </a:r>
             <a:endParaRPr lang="en-US" dirty="0"/>
           </a:p>
@@ -3364,7 +3367,7 @@
           <a:p>
             <a:r>
               <a:rPr lang="en-US" dirty="0"/>
-              <a:t>The expected answer is: water enters (rain) and leaves (evaporation, rivers). If you got it right, well done.</a:t>
+              <a:t>Now let us check what you have understood. Question 1: What is evaporation? Answer in your exercise book.</a:t>
             </a:r>
             <a:endParaRPr lang="en-US" dirty="0"/>
           </a:p>
@@ -3540,7 +3543,7 @@
           <a:p>
             <a:r>
               <a:rPr lang="en-US" dirty="0"/>
-              <a:t>For those who need more practice, fill in the blanks in your exercise book. The answers are: number 1, evaporation; number 2, runoff; number 3, precipitation.</a:t>
+              <a:t>The expected answer is: water changing into vapour. If you got it right, well done.</a:t>
             </a:r>
             <a:endParaRPr lang="en-US" dirty="0"/>
           </a:p>
@@ -3628,7 +3631,7 @@
           <a:p>
             <a:r>
               <a:rPr lang="en-US" dirty="0"/>
-              <a:t>For your homework: Ask your grandparents or an elder whether the dry season is hotter or longer today than when they were young. Write down what they say. We shall correct it at the beginning of our next lesson.</a:t>
+              <a:t>Now let us check what you have understood. Question 2: Why is a drainage basin an open system? Answer in your exercise book.</a:t>
             </a:r>
             <a:endParaRPr lang="en-US" dirty="0"/>
           </a:p>
@@ -3716,7 +3719,7 @@
           <a:p>
             <a:r>
               <a:rPr lang="en-US" dirty="0"/>
-              <a:t>Our next lesson will be on Lesson 40: Global Warming. Thank you for your attention, and see you next time.</a:t>
+              <a:t>The expected answer is: water enters (rain) and leaves (evaporation, rivers). If you got it right, well done.</a:t>
             </a:r>
             <a:endParaRPr lang="en-US" dirty="0"/>
           </a:p>
@@ -3804,7 +3807,7 @@
           <a:p>
             <a:r>
               <a:rPr lang="en-US" dirty="0"/>
-              <a:t>Let us play the bilingual game. I say a word in English, and you give me the French word. Then we do the reverse.</a:t>
+              <a:t>For those who need more practice, fill in the blanks in your exercise book. The answers are: number 1, evaporation; number 2, runoff; number 3, precipitation.</a:t>
             </a:r>
             <a:endParaRPr lang="en-US" dirty="0"/>
           </a:p>
@@ -3892,7 +3895,7 @@
           <a:p>
             <a:r>
               <a:rPr lang="en-US" dirty="0"/>
-              <a:t>I record this information in the official logbook of the class after the lesson.</a:t>
+              <a:t>For your homework: Ask your grandparents or an elder whether the dry season is hotter or longer today than when they were young. Write down what they say. We shall correct it at the beginning of our next lesson.</a:t>
             </a:r>
             <a:endParaRPr lang="en-US" dirty="0"/>
           </a:p>
@@ -3980,7 +3983,7 @@
           <a:p>
             <a:r>
               <a:rPr lang="en-US" dirty="0"/>
-              <a:t>I complete the second page of the logbook: the matter taught, the evaluation, the homework and the attendance.</a:t>
+              <a:t>Our next lesson will be on Lesson 40: Global Warming. Thank you for your attention, and see you next time.</a:t>
             </a:r>
             <a:endParaRPr lang="en-US" dirty="0"/>
           </a:p>
@@ -4068,7 +4071,7 @@
           <a:p>
             <a:r>
               <a:rPr lang="en-US" dirty="0"/>
-              <a:t>This slide is for me, the teacher: it gives the timing of the lesson and what to do if the projector is not available.</a:t>
+              <a:t>Let us play the bilingual game. I say a word in English, and you give me the French word. Then we do the reverse.</a:t>
             </a:r>
             <a:endParaRPr lang="en-US" dirty="0"/>
           </a:p>
@@ -4156,7 +4159,7 @@
           <a:p>
             <a:r>
               <a:rPr lang="en-US" dirty="0"/>
-              <a:t>These are the references and picture credits used to prepare this lesson.</a:t>
+              <a:t>I record this information in the official logbook of the class after the lesson.</a:t>
             </a:r>
             <a:endParaRPr lang="en-US" dirty="0"/>
           </a:p>
@@ -4180,6 +4183,182 @@
             <a:fld id="{F7021451-1387-4CA6-816F-3879F97B5CBC}" type="slidenum">
               <a:rPr lang="en-US"/>
               <a:t>47</a:t>
+            </a:fld>
+            <a:endParaRPr lang="en-US"/>
+          </a:p>
+        </p:txBody>
+      </p:sp>
+    </p:spTree>
+    <p:extLst>
+      <p:ext uri="{BB962C8B-B14F-4D97-AF65-F5344CB8AC3E}">
+        <p14:creationId xmlns:p14="http://schemas.microsoft.com/office/powerpoint/2010/main" val="1024086991"/>
+      </p:ext>
+    </p:extLst>
+  </p:cSld>
+  <p:clrMapOvr>
+    <a:masterClrMapping/>
+  </p:clrMapOvr>
+</p:notes>
+</file>
+
+<file path=ppt/notesSlides/notesSlide48.xml><?xml version="1.0" encoding="utf-8"?>
+<p:notes xmlns:a="http://schemas.openxmlformats.org/drawingml/2006/main" xmlns:r="http://schemas.openxmlformats.org/officeDocument/2006/relationships" xmlns:p="http://schemas.openxmlformats.org/presentationml/2006/main">
+  <p:cSld>
+    <p:spTree>
+      <p:nvGrpSpPr>
+        <p:cNvPr id="1" name=""/>
+        <p:cNvGrpSpPr/>
+        <p:nvPr/>
+      </p:nvGrpSpPr>
+      <p:grpSpPr>
+        <a:xfrm>
+          <a:off x="0" y="0"/>
+          <a:ext cx="0" cy="0"/>
+          <a:chOff x="0" y="0"/>
+          <a:chExt cx="0" cy="0"/>
+        </a:xfrm>
+      </p:grpSpPr>
+      <p:sp>
+        <p:nvSpPr>
+          <p:cNvPr id="2" name="Slide Image Placeholder 1"/>
+          <p:cNvSpPr>
+            <a:spLocks noGrp="1" noRot="1" noChangeAspect="1"/>
+          </p:cNvSpPr>
+          <p:nvPr>
+            <p:ph type="sldImg"/>
+          </p:nvPr>
+        </p:nvSpPr>
+        <p:spPr/>
+      </p:sp>
+      <p:sp>
+        <p:nvSpPr>
+          <p:cNvPr id="3" name="Notes Placeholder 2"/>
+          <p:cNvSpPr>
+            <a:spLocks noGrp="1"/>
+          </p:cNvSpPr>
+          <p:nvPr>
+            <p:ph type="body" idx="1"/>
+          </p:nvPr>
+        </p:nvSpPr>
+        <p:spPr/>
+        <p:txBody>
+          <a:bodyPr/>
+          <a:lstStyle/>
+          <a:p>
+            <a:r>
+              <a:rPr lang="en-US" dirty="0"/>
+              <a:t>I complete the second page of the logbook: the matter taught, the evaluation, the homework and the attendance.</a:t>
+            </a:r>
+            <a:endParaRPr lang="en-US" dirty="0"/>
+          </a:p>
+        </p:txBody>
+      </p:sp>
+      <p:sp>
+        <p:nvSpPr>
+          <p:cNvPr id="4" name="Slide Number Placeholder 3"/>
+          <p:cNvSpPr>
+            <a:spLocks noGrp="1"/>
+          </p:cNvSpPr>
+          <p:nvPr>
+            <p:ph type="sldNum" sz="quarter" idx="10"/>
+          </p:nvPr>
+        </p:nvSpPr>
+        <p:spPr/>
+        <p:txBody>
+          <a:bodyPr/>
+          <a:lstStyle/>
+          <a:p>
+            <a:fld id="{F7021451-1387-4CA6-816F-3879F97B5CBC}" type="slidenum">
+              <a:rPr lang="en-US"/>
+              <a:t>48</a:t>
+            </a:fld>
+            <a:endParaRPr lang="en-US"/>
+          </a:p>
+        </p:txBody>
+      </p:sp>
+    </p:spTree>
+    <p:extLst>
+      <p:ext uri="{BB962C8B-B14F-4D97-AF65-F5344CB8AC3E}">
+        <p14:creationId xmlns:p14="http://schemas.microsoft.com/office/powerpoint/2010/main" val="1024086991"/>
+      </p:ext>
+    </p:extLst>
+  </p:cSld>
+  <p:clrMapOvr>
+    <a:masterClrMapping/>
+  </p:clrMapOvr>
+</p:notes>
+</file>
+
+<file path=ppt/notesSlides/notesSlide49.xml><?xml version="1.0" encoding="utf-8"?>
+<p:notes xmlns:a="http://schemas.openxmlformats.org/drawingml/2006/main" xmlns:r="http://schemas.openxmlformats.org/officeDocument/2006/relationships" xmlns:p="http://schemas.openxmlformats.org/presentationml/2006/main">
+  <p:cSld>
+    <p:spTree>
+      <p:nvGrpSpPr>
+        <p:cNvPr id="1" name=""/>
+        <p:cNvGrpSpPr/>
+        <p:nvPr/>
+      </p:nvGrpSpPr>
+      <p:grpSpPr>
+        <a:xfrm>
+          <a:off x="0" y="0"/>
+          <a:ext cx="0" cy="0"/>
+          <a:chOff x="0" y="0"/>
+          <a:chExt cx="0" cy="0"/>
+        </a:xfrm>
+      </p:grpSpPr>
+      <p:sp>
+        <p:nvSpPr>
+          <p:cNvPr id="2" name="Slide Image Placeholder 1"/>
+          <p:cNvSpPr>
+            <a:spLocks noGrp="1" noRot="1" noChangeAspect="1"/>
+          </p:cNvSpPr>
+          <p:nvPr>
+            <p:ph type="sldImg"/>
+          </p:nvPr>
+        </p:nvSpPr>
+        <p:spPr/>
+      </p:sp>
+      <p:sp>
+        <p:nvSpPr>
+          <p:cNvPr id="3" name="Notes Placeholder 2"/>
+          <p:cNvSpPr>
+            <a:spLocks noGrp="1"/>
+          </p:cNvSpPr>
+          <p:nvPr>
+            <p:ph type="body" idx="1"/>
+          </p:nvPr>
+        </p:nvSpPr>
+        <p:spPr/>
+        <p:txBody>
+          <a:bodyPr/>
+          <a:lstStyle/>
+          <a:p>
+            <a:r>
+              <a:rPr lang="en-US" dirty="0"/>
+              <a:t>This slide is for me, the teacher: it gives the timing of the lesson and what to do if the projector is not available.</a:t>
+            </a:r>
+            <a:endParaRPr lang="en-US" dirty="0"/>
+          </a:p>
+        </p:txBody>
+      </p:sp>
+      <p:sp>
+        <p:nvSpPr>
+          <p:cNvPr id="4" name="Slide Number Placeholder 3"/>
+          <p:cNvSpPr>
+            <a:spLocks noGrp="1"/>
+          </p:cNvSpPr>
+          <p:nvPr>
+            <p:ph type="sldNum" sz="quarter" idx="10"/>
+          </p:nvPr>
+        </p:nvSpPr>
+        <p:spPr/>
+        <p:txBody>
+          <a:bodyPr/>
+          <a:lstStyle/>
+          <a:p>
+            <a:fld id="{F7021451-1387-4CA6-816F-3879F97B5CBC}" type="slidenum">
+              <a:rPr lang="en-US"/>
+              <a:t>49</a:t>
             </a:fld>
             <a:endParaRPr lang="en-US"/>
           </a:p>
@@ -4268,6 +4447,94 @@
             <a:fld id="{F7021451-1387-4CA6-816F-3879F97B5CBC}" type="slidenum">
               <a:rPr lang="en-US"/>
               <a:t>5</a:t>
+            </a:fld>
+            <a:endParaRPr lang="en-US"/>
+          </a:p>
+        </p:txBody>
+      </p:sp>
+    </p:spTree>
+    <p:extLst>
+      <p:ext uri="{BB962C8B-B14F-4D97-AF65-F5344CB8AC3E}">
+        <p14:creationId xmlns:p14="http://schemas.microsoft.com/office/powerpoint/2010/main" val="1024086991"/>
+      </p:ext>
+    </p:extLst>
+  </p:cSld>
+  <p:clrMapOvr>
+    <a:masterClrMapping/>
+  </p:clrMapOvr>
+</p:notes>
+</file>
+
+<file path=ppt/notesSlides/notesSlide50.xml><?xml version="1.0" encoding="utf-8"?>
+<p:notes xmlns:a="http://schemas.openxmlformats.org/drawingml/2006/main" xmlns:r="http://schemas.openxmlformats.org/officeDocument/2006/relationships" xmlns:p="http://schemas.openxmlformats.org/presentationml/2006/main">
+  <p:cSld>
+    <p:spTree>
+      <p:nvGrpSpPr>
+        <p:cNvPr id="1" name=""/>
+        <p:cNvGrpSpPr/>
+        <p:nvPr/>
+      </p:nvGrpSpPr>
+      <p:grpSpPr>
+        <a:xfrm>
+          <a:off x="0" y="0"/>
+          <a:ext cx="0" cy="0"/>
+          <a:chOff x="0" y="0"/>
+          <a:chExt cx="0" cy="0"/>
+        </a:xfrm>
+      </p:grpSpPr>
+      <p:sp>
+        <p:nvSpPr>
+          <p:cNvPr id="2" name="Slide Image Placeholder 1"/>
+          <p:cNvSpPr>
+            <a:spLocks noGrp="1" noRot="1" noChangeAspect="1"/>
+          </p:cNvSpPr>
+          <p:nvPr>
+            <p:ph type="sldImg"/>
+          </p:nvPr>
+        </p:nvSpPr>
+        <p:spPr/>
+      </p:sp>
+      <p:sp>
+        <p:nvSpPr>
+          <p:cNvPr id="3" name="Notes Placeholder 2"/>
+          <p:cNvSpPr>
+            <a:spLocks noGrp="1"/>
+          </p:cNvSpPr>
+          <p:nvPr>
+            <p:ph type="body" idx="1"/>
+          </p:nvPr>
+        </p:nvSpPr>
+        <p:spPr/>
+        <p:txBody>
+          <a:bodyPr/>
+          <a:lstStyle/>
+          <a:p>
+            <a:r>
+              <a:rPr lang="en-US" dirty="0"/>
+              <a:t>These are the references and picture credits used to prepare this lesson.</a:t>
+            </a:r>
+            <a:endParaRPr lang="en-US" dirty="0"/>
+          </a:p>
+        </p:txBody>
+      </p:sp>
+      <p:sp>
+        <p:nvSpPr>
+          <p:cNvPr id="4" name="Slide Number Placeholder 3"/>
+          <p:cNvSpPr>
+            <a:spLocks noGrp="1"/>
+          </p:cNvSpPr>
+          <p:nvPr>
+            <p:ph type="sldNum" sz="quarter" idx="10"/>
+          </p:nvPr>
+        </p:nvSpPr>
+        <p:spPr/>
+        <p:txBody>
+          <a:bodyPr/>
+          <a:lstStyle/>
+          <a:p>
+            <a:fld id="{F7021451-1387-4CA6-816F-3879F97B5CBC}" type="slidenum">
+              <a:rPr lang="en-US"/>
+              <a:t>50</a:t>
             </a:fld>
             <a:endParaRPr lang="en-US"/>
           </a:p>
@@ -5976,7 +6243,7 @@
         <p:spPr>
           <a:xfrm>
             <a:off x="0" y="658368"/>
-            <a:ext cx="5120640" cy="5833872"/>
+            <a:ext cx="3840480" cy="5833872"/>
           </a:xfrm>
           <a:prstGeom prst="rect">
             <a:avLst/>
@@ -5991,8 +6258,8 @@
         </p:nvSpPr>
         <p:spPr>
           <a:xfrm>
-            <a:off x="5349240" y="1005840"/>
-            <a:ext cx="6522415" cy="731520"/>
+            <a:off x="4069080" y="1005840"/>
+            <a:ext cx="7802575" cy="731520"/>
           </a:xfrm>
           <a:prstGeom prst="rect">
             <a:avLst/>
@@ -6032,8 +6299,8 @@
         </p:nvSpPr>
         <p:spPr>
           <a:xfrm>
-            <a:off x="5349240" y="1783080"/>
-            <a:ext cx="6522415" cy="4663440"/>
+            <a:off x="4069080" y="1783080"/>
+            <a:ext cx="7802575" cy="4663440"/>
           </a:xfrm>
           <a:prstGeom prst="rect">
             <a:avLst/>
@@ -6060,7 +6327,7 @@
                 <a:ea typeface="Times New Roman" pitchFamily="34" charset="-122"/>
                 <a:cs typeface="Times New Roman" pitchFamily="34" charset="-120"/>
               </a:rPr>
-              <a:t>In March, the Benue at Garoua is shallow with many sandbanks. In September, after months of rain, the river is wide and full. Mohamadou wonders where the water goes and comes from.</a:t>
+              <a:t>In March, the Benue at Garoua is shallow with many sandbanks. In September, after months of rain, the river is wide and full. Mohamadou asks: "Where does all this water come from, and where does it go afterwards?"</a:t>
             </a:r>
             <a:endParaRPr lang="en-US" sz="4000" dirty="0"/>
           </a:p>
@@ -6498,7 +6765,7 @@
                 <a:ea typeface="Times New Roman" pitchFamily="34" charset="-122"/>
                 <a:cs typeface="Times New Roman" pitchFamily="34" charset="-120"/>
               </a:rPr>
-              <a:t>Mohamadou does not know where the water of the Benue comes from.</a:t>
+              <a:t>Mohamadou does not know where the river water comes from and where it goes.</a:t>
             </a:r>
             <a:endParaRPr lang="en-US" sz="4000" dirty="0"/>
           </a:p>
@@ -6717,7 +6984,7 @@
                 <a:ea typeface="Times New Roman" pitchFamily="34" charset="-122"/>
                 <a:cs typeface="Times New Roman" pitchFamily="34" charset="-120"/>
               </a:rPr>
-              <a:t>When is the river full?</a:t>
+              <a:t>When is the Benue full?</a:t>
             </a:r>
             <a:endParaRPr lang="en-US" sz="4000" dirty="0"/>
           </a:p>
@@ -6936,7 +7203,7 @@
                 <a:ea typeface="Times New Roman" pitchFamily="34" charset="-122"/>
                 <a:cs typeface="Times New Roman" pitchFamily="34" charset="-120"/>
               </a:rPr>
-              <a:t>In September.</a:t>
+              <a:t>In September, after the rains.</a:t>
             </a:r>
             <a:endParaRPr lang="en-US" sz="4000" dirty="0"/>
           </a:p>
@@ -7155,7 +7422,7 @@
                 <a:ea typeface="Times New Roman" pitchFamily="34" charset="-122"/>
                 <a:cs typeface="Times New Roman" pitchFamily="34" charset="-120"/>
               </a:rPr>
-              <a:t>Where does the water come from?</a:t>
+              <a:t>Where does the river water finally go?</a:t>
             </a:r>
             <a:endParaRPr lang="en-US" sz="4000" dirty="0"/>
           </a:p>
@@ -7374,7 +7641,7 @@
                 <a:ea typeface="Times New Roman" pitchFamily="34" charset="-122"/>
                 <a:cs typeface="Times New Roman" pitchFamily="34" charset="-120"/>
               </a:rPr>
-              <a:t>From the rain.</a:t>
+              <a:t>To the sea (the Atlantic Ocean, through the Niger).</a:t>
             </a:r>
             <a:endParaRPr lang="en-US" sz="4000" dirty="0"/>
           </a:p>
@@ -7924,7 +8191,7 @@
                 <a:ea typeface="Calibri" pitchFamily="34" charset="-122"/>
                 <a:cs typeface="Calibri" pitchFamily="34" charset="-120"/>
               </a:rPr>
-              <a:t>1. THE HYDROLOGICAL CYCLE</a:t>
+              <a:t>1. MEANING</a:t>
             </a:r>
             <a:endParaRPr lang="en-US" sz="1400" dirty="0"/>
           </a:p>
@@ -8026,7 +8293,7 @@
                 <a:ea typeface="Times New Roman" pitchFamily="34" charset="-122"/>
                 <a:cs typeface="Times New Roman" pitchFamily="34" charset="-120"/>
               </a:rPr>
-              <a:t>Animation: the journey of water.</a:t>
+              <a:t>Animation: the water cycle.</a:t>
             </a:r>
             <a:endParaRPr lang="en-US" sz="1800" dirty="0"/>
           </a:p>
@@ -8733,7 +9000,7 @@
                 <a:ea typeface="Calibri" pitchFamily="34" charset="-122"/>
                 <a:cs typeface="Calibri" pitchFamily="34" charset="-120"/>
               </a:rPr>
-              <a:t>1. THE HYDROLOGICAL CYCLE</a:t>
+              <a:t>1. MEANING</a:t>
             </a:r>
             <a:endParaRPr lang="en-US" sz="1400" dirty="0"/>
           </a:p>
@@ -8840,7 +9107,7 @@
                 <a:ea typeface="Times New Roman" pitchFamily="34" charset="-122"/>
                 <a:cs typeface="Times New Roman" pitchFamily="34" charset="-120"/>
               </a:rPr>
-              <a:t>Name the four steps of the water cycle.</a:t>
+              <a:t>What happens to sea water heated by the Sun?</a:t>
             </a:r>
             <a:endParaRPr lang="en-US" sz="4000" dirty="0"/>
           </a:p>
@@ -8952,7 +9219,7 @@
                 <a:ea typeface="Calibri" pitchFamily="34" charset="-122"/>
                 <a:cs typeface="Calibri" pitchFamily="34" charset="-120"/>
               </a:rPr>
-              <a:t>1. THE HYDROLOGICAL CYCLE</a:t>
+              <a:t>1. MEANING</a:t>
             </a:r>
             <a:endParaRPr lang="en-US" sz="1400" dirty="0"/>
           </a:p>
@@ -9059,7 +9326,7 @@
                 <a:ea typeface="Times New Roman" pitchFamily="34" charset="-122"/>
                 <a:cs typeface="Times New Roman" pitchFamily="34" charset="-120"/>
               </a:rPr>
-              <a:t>Evaporation, condensation, precipitation, runoff.</a:t>
+              <a:t>It evaporates and becomes water vapour.</a:t>
             </a:r>
             <a:endParaRPr lang="en-US" sz="4000" dirty="0"/>
           </a:p>
@@ -9171,7 +9438,7 @@
                 <a:ea typeface="Calibri" pitchFamily="34" charset="-122"/>
                 <a:cs typeface="Calibri" pitchFamily="34" charset="-120"/>
               </a:rPr>
-              <a:t>1. THE HYDROLOGICAL CYCLE</a:t>
+              <a:t>1. MEANING</a:t>
             </a:r>
             <a:endParaRPr lang="en-US" sz="1400" dirty="0"/>
           </a:p>
@@ -9273,7 +9540,7 @@
                 <a:ea typeface="Times New Roman" pitchFamily="34" charset="-122"/>
                 <a:cs typeface="Times New Roman" pitchFamily="34" charset="-120"/>
               </a:rPr>
-              <a:t>A big river seen from space.</a:t>
+              <a:t>A river after rain.</a:t>
             </a:r>
             <a:endParaRPr lang="en-US" sz="1800" dirty="0"/>
           </a:p>
@@ -9385,7 +9652,7 @@
                 <a:ea typeface="Calibri" pitchFamily="34" charset="-122"/>
                 <a:cs typeface="Calibri" pitchFamily="34" charset="-120"/>
               </a:rPr>
-              <a:t>1. THE HYDROLOGICAL CYCLE</a:t>
+              <a:t>1. MEANING</a:t>
             </a:r>
             <a:endParaRPr lang="en-US" sz="1400" dirty="0"/>
           </a:p>
@@ -9604,7 +9871,7 @@
                 <a:ea typeface="Calibri" pitchFamily="34" charset="-122"/>
                 <a:cs typeface="Calibri" pitchFamily="34" charset="-120"/>
               </a:rPr>
-              <a:t>1. THE HYDROLOGICAL CYCLE</a:t>
+              <a:t>1. MEANING</a:t>
             </a:r>
             <a:endParaRPr lang="en-US" sz="1400" dirty="0"/>
           </a:p>
@@ -9711,7 +9978,7 @@
                 <a:ea typeface="Times New Roman" pitchFamily="34" charset="-122"/>
                 <a:cs typeface="Times New Roman" pitchFamily="34" charset="-120"/>
               </a:rPr>
-              <a:t>It runs on the ground (runoff) or flows under the ground.</a:t>
+              <a:t>It runs over the ground (runoff) or flows through the soil and rocks.</a:t>
             </a:r>
             <a:endParaRPr lang="en-US" sz="4000" dirty="0"/>
           </a:p>
@@ -9925,7 +10192,7 @@
                 <a:ea typeface="Times New Roman" pitchFamily="34" charset="-122"/>
                 <a:cs typeface="Times New Roman" pitchFamily="34" charset="-120"/>
               </a:rPr>
-              <a:t>The drainage basin as a system.</a:t>
+              <a:t>Inputs, stores and outputs.</a:t>
             </a:r>
             <a:endParaRPr lang="en-US" sz="1800" dirty="0"/>
           </a:p>
@@ -10102,7 +10369,7 @@
                 <a:ea typeface="Times New Roman" pitchFamily="34" charset="-122"/>
                 <a:cs typeface="Times New Roman" pitchFamily="34" charset="-120"/>
               </a:rPr>
-              <a:t>Activity 3: Question</a:t>
+              <a:t>Activity 3: Question 1</a:t>
             </a:r>
             <a:endParaRPr lang="en-US" sz="3600" dirty="0"/>
           </a:p>
@@ -10144,7 +10411,7 @@
                 <a:ea typeface="Times New Roman" pitchFamily="34" charset="-122"/>
                 <a:cs typeface="Times New Roman" pitchFamily="34" charset="-120"/>
               </a:rPr>
-              <a:t>What is the input? Name two outputs.</a:t>
+              <a:t>What is the input of water to a drainage basin?</a:t>
             </a:r>
             <a:endParaRPr lang="en-US" sz="4000" dirty="0"/>
           </a:p>
@@ -10321,7 +10588,7 @@
                 <a:ea typeface="Times New Roman" pitchFamily="34" charset="-122"/>
                 <a:cs typeface="Times New Roman" pitchFamily="34" charset="-120"/>
               </a:rPr>
-              <a:t>Activity 3: Answer</a:t>
+              <a:t>Activity 3: Answer 1</a:t>
             </a:r>
             <a:endParaRPr lang="en-US" sz="3600" dirty="0"/>
           </a:p>
@@ -10363,7 +10630,7 @@
                 <a:ea typeface="Times New Roman" pitchFamily="34" charset="-122"/>
                 <a:cs typeface="Times New Roman" pitchFamily="34" charset="-120"/>
               </a:rPr>
-              <a:t>Input: rain. Outputs: evaporation and river flow to the sea.</a:t>
+              <a:t>Precipitation (rain).</a:t>
             </a:r>
             <a:endParaRPr lang="en-US" sz="4000" dirty="0"/>
           </a:p>
@@ -10475,7 +10742,7 @@
                 <a:ea typeface="Calibri" pitchFamily="34" charset="-122"/>
                 <a:cs typeface="Calibri" pitchFamily="34" charset="-120"/>
               </a:rPr>
-              <a:t>BOARD SUMMARY</a:t>
+              <a:t>2. AN OPEN SYSTEM</a:t>
             </a:r>
             <a:endParaRPr lang="en-US" sz="1400" dirty="0"/>
           </a:p>
@@ -10540,7 +10807,7 @@
                 <a:ea typeface="Times New Roman" pitchFamily="34" charset="-122"/>
                 <a:cs typeface="Times New Roman" pitchFamily="34" charset="-120"/>
               </a:rPr>
-              <a:t>Board Summary</a:t>
+              <a:t>Activity 3: Question 2</a:t>
             </a:r>
             <a:endParaRPr lang="en-US" sz="3600" dirty="0"/>
           </a:p>
@@ -10574,7 +10841,7 @@
               <a:buNone/>
             </a:pPr>
             <a:r>
-              <a:rPr lang="en-US" sz="4000" b="1" dirty="0">
+              <a:rPr lang="en-US" sz="4000" dirty="0">
                 <a:solidFill>
                   <a:srgbClr val="111111"/>
                 </a:solidFill>
@@ -10582,47 +10849,7 @@
                 <a:ea typeface="Times New Roman" pitchFamily="34" charset="-122"/>
                 <a:cs typeface="Times New Roman" pitchFamily="34" charset="-120"/>
               </a:rPr>
-              <a:t>Topic: Circulation of Water in Nature</a:t>
-            </a:r>
-            <a:endParaRPr lang="en-US" sz="4000" dirty="0"/>
-          </a:p>
-          <a:p>
-            <a:pPr algn="l" indent="0" marL="0">
-              <a:spcAft>
-                <a:spcPts val="800"/>
-              </a:spcAft>
-              <a:buNone/>
-            </a:pPr>
-            <a:r>
-              <a:rPr lang="en-US" sz="4000" b="1" dirty="0">
-                <a:solidFill>
-                  <a:srgbClr val="111111"/>
-                </a:solidFill>
-                <a:latin typeface="Times New Roman" pitchFamily="34" charset="0"/>
-                <a:ea typeface="Times New Roman" pitchFamily="34" charset="-122"/>
-                <a:cs typeface="Times New Roman" pitchFamily="34" charset="-120"/>
-              </a:rPr>
-              <a:t>Sub-topic: The Hydrological Cycle</a:t>
-            </a:r>
-            <a:endParaRPr lang="en-US" sz="4000" dirty="0"/>
-          </a:p>
-          <a:p>
-            <a:pPr algn="l" indent="0" marL="0">
-              <a:spcAft>
-                <a:spcPts val="800"/>
-              </a:spcAft>
-              <a:buNone/>
-            </a:pPr>
-            <a:r>
-              <a:rPr lang="en-US" sz="4000" b="1" dirty="0">
-                <a:solidFill>
-                  <a:srgbClr val="990011"/>
-                </a:solidFill>
-                <a:latin typeface="Times New Roman" pitchFamily="34" charset="0"/>
-                <a:ea typeface="Times New Roman" pitchFamily="34" charset="-122"/>
-                <a:cs typeface="Times New Roman" pitchFamily="34" charset="-120"/>
-              </a:rPr>
-              <a:t>Lesson 39: The Hydrological Cycle</a:t>
+              <a:t>Name one output.</a:t>
             </a:r>
             <a:endParaRPr lang="en-US" sz="4000" dirty="0"/>
           </a:p>
@@ -10734,7 +10961,7 @@
                 <a:ea typeface="Calibri" pitchFamily="34" charset="-122"/>
                 <a:cs typeface="Calibri" pitchFamily="34" charset="-120"/>
               </a:rPr>
-              <a:t>BOARD SUMMARY</a:t>
+              <a:t>2. AN OPEN SYSTEM</a:t>
             </a:r>
             <a:endParaRPr lang="en-US" sz="1400" dirty="0"/>
           </a:p>
@@ -10757,7 +10984,7 @@
         <p:spPr>
           <a:xfrm>
             <a:off x="0" y="658368"/>
-            <a:ext cx="3840480" cy="5833872"/>
+            <a:ext cx="5120640" cy="5833872"/>
           </a:xfrm>
           <a:prstGeom prst="rect">
             <a:avLst/>
@@ -10772,8 +10999,8 @@
         </p:nvSpPr>
         <p:spPr>
           <a:xfrm>
-            <a:off x="4069080" y="1005840"/>
-            <a:ext cx="7802575" cy="731520"/>
+            <a:off x="5349240" y="1005840"/>
+            <a:ext cx="6522415" cy="731520"/>
           </a:xfrm>
           <a:prstGeom prst="rect">
             <a:avLst/>
@@ -10799,7 +11026,7 @@
                 <a:ea typeface="Times New Roman" pitchFamily="34" charset="-122"/>
                 <a:cs typeface="Times New Roman" pitchFamily="34" charset="-120"/>
               </a:rPr>
-              <a:t>1. The Hydrological Cycle</a:t>
+              <a:t>Activity 3: Answer 2</a:t>
             </a:r>
             <a:endParaRPr lang="en-US" sz="3600" dirty="0"/>
           </a:p>
@@ -10813,47 +11040,8 @@
         </p:nvSpPr>
         <p:spPr>
           <a:xfrm>
-            <a:off x="4069080" y="1737360"/>
-            <a:ext cx="7802575" cy="457200"/>
-          </a:xfrm>
-          <a:prstGeom prst="rect">
-            <a:avLst/>
-          </a:prstGeom>
-          <a:noFill/>
-          <a:ln/>
-        </p:spPr>
-        <p:txBody>
-          <a:bodyPr wrap="square" lIns="0" tIns="0" rIns="0" bIns="0" rtlCol="0" anchor="ctr"/>
-          <a:lstStyle/>
-          <a:p>
-            <a:pPr algn="l" indent="0" marL="0">
-              <a:buNone/>
-            </a:pPr>
-            <a:r>
-              <a:rPr lang="en-US" sz="3200" b="1" dirty="0">
-                <a:solidFill>
-                  <a:srgbClr val="990011"/>
-                </a:solidFill>
-                <a:latin typeface="Times New Roman" pitchFamily="34" charset="0"/>
-                <a:ea typeface="Times New Roman" pitchFamily="34" charset="-122"/>
-                <a:cs typeface="Times New Roman" pitchFamily="34" charset="-120"/>
-              </a:rPr>
-              <a:t>A) Meaning</a:t>
-            </a:r>
-            <a:endParaRPr lang="en-US" sz="3200" dirty="0"/>
-          </a:p>
-        </p:txBody>
-      </p:sp>
-      <p:sp>
-        <p:nvSpPr>
-          <p:cNvPr id="6" name="Text 3"/>
-          <p:cNvSpPr/>
-          <p:nvPr/>
-        </p:nvSpPr>
-        <p:spPr>
-          <a:xfrm>
-            <a:off x="4069080" y="2240280"/>
-            <a:ext cx="7802575" cy="4206240"/>
+            <a:off x="5349240" y="1783080"/>
+            <a:ext cx="6522415" cy="4663440"/>
           </a:xfrm>
           <a:prstGeom prst="rect">
             <a:avLst/>
@@ -10872,7 +11060,7 @@
               <a:buNone/>
             </a:pPr>
             <a:r>
-              <a:rPr lang="en-US" sz="4000" i="1" dirty="0">
+              <a:rPr lang="en-US" sz="4000" dirty="0">
                 <a:solidFill>
                   <a:srgbClr val="111111"/>
                 </a:solidFill>
@@ -10880,44 +11068,7 @@
                 <a:ea typeface="Times New Roman" pitchFamily="34" charset="-122"/>
                 <a:cs typeface="Times New Roman" pitchFamily="34" charset="-120"/>
               </a:rPr>
-              <a:t>The hydrological cycle is defined as follows:</a:t>
-            </a:r>
-            <a:endParaRPr lang="en-US" sz="4000" dirty="0"/>
-          </a:p>
-          <a:p>
-            <a:pPr algn="l" indent="0" marL="0">
-              <a:spcAft>
-                <a:spcPts val="800"/>
-              </a:spcAft>
-              <a:buNone/>
-            </a:pPr>
-            <a:r>
-              <a:rPr lang="en-US" sz="4000" b="1" dirty="0">
-                <a:solidFill>
-                  <a:srgbClr val="111111"/>
-                </a:solidFill>
-                <a:latin typeface="Times New Roman" pitchFamily="34" charset="0"/>
-                <a:ea typeface="Times New Roman" pitchFamily="34" charset="-122"/>
-                <a:cs typeface="Times New Roman" pitchFamily="34" charset="-120"/>
-              </a:rPr>
-              <a:t>Hydrological cycle: </a:t>
-            </a:r>
-            <a:pPr algn="l" indent="0" marL="0">
-              <a:spcAft>
-                <a:spcPts val="800"/>
-              </a:spcAft>
-              <a:buNone/>
-            </a:pPr>
-            <a:r>
-              <a:rPr lang="en-US" sz="4000" dirty="0">
-                <a:solidFill>
-                  <a:srgbClr val="111111"/>
-                </a:solidFill>
-                <a:latin typeface="Times New Roman" pitchFamily="34" charset="0"/>
-                <a:ea typeface="Times New Roman" pitchFamily="34" charset="-122"/>
-                <a:cs typeface="Times New Roman" pitchFamily="34" charset="-120"/>
-              </a:rPr>
-              <a:t>It is the continuous movement of water from the sea to the air, to the land and back to the sea.</a:t>
+              <a:t>Evaporation (or river flow to the sea).</a:t>
             </a:r>
             <a:endParaRPr lang="en-US" sz="4000" dirty="0"/>
           </a:p>
@@ -12061,7 +12212,7 @@
         <p:spPr>
           <a:xfrm>
             <a:off x="0" y="658368"/>
-            <a:ext cx="2468880" cy="5833872"/>
+            <a:ext cx="5120640" cy="5833872"/>
           </a:xfrm>
           <a:prstGeom prst="rect">
             <a:avLst/>
@@ -12076,8 +12227,8 @@
         </p:nvSpPr>
         <p:spPr>
           <a:xfrm>
-            <a:off x="2697480" y="1005840"/>
-            <a:ext cx="9174175" cy="731520"/>
+            <a:off x="5349240" y="1005840"/>
+            <a:ext cx="6522415" cy="731520"/>
           </a:xfrm>
           <a:prstGeom prst="rect">
             <a:avLst/>
@@ -12103,7 +12254,7 @@
                 <a:ea typeface="Times New Roman" pitchFamily="34" charset="-122"/>
                 <a:cs typeface="Times New Roman" pitchFamily="34" charset="-120"/>
               </a:rPr>
-              <a:t>1. The Hydrological Cycle</a:t>
+              <a:t>Board Summary</a:t>
             </a:r>
             <a:endParaRPr lang="en-US" sz="3600" dirty="0"/>
           </a:p>
@@ -12117,47 +12268,8 @@
         </p:nvSpPr>
         <p:spPr>
           <a:xfrm>
-            <a:off x="2697480" y="1737360"/>
-            <a:ext cx="9174175" cy="457200"/>
-          </a:xfrm>
-          <a:prstGeom prst="rect">
-            <a:avLst/>
-          </a:prstGeom>
-          <a:noFill/>
-          <a:ln/>
-        </p:spPr>
-        <p:txBody>
-          <a:bodyPr wrap="square" lIns="0" tIns="0" rIns="0" bIns="0" rtlCol="0" anchor="ctr"/>
-          <a:lstStyle/>
-          <a:p>
-            <a:pPr algn="l" indent="0" marL="0">
-              <a:buNone/>
-            </a:pPr>
-            <a:r>
-              <a:rPr lang="en-US" sz="3200" b="1" dirty="0">
-                <a:solidFill>
-                  <a:srgbClr val="990011"/>
-                </a:solidFill>
-                <a:latin typeface="Times New Roman" pitchFamily="34" charset="0"/>
-                <a:ea typeface="Times New Roman" pitchFamily="34" charset="-122"/>
-                <a:cs typeface="Times New Roman" pitchFamily="34" charset="-120"/>
-              </a:rPr>
-              <a:t>B) Components</a:t>
-            </a:r>
-            <a:endParaRPr lang="en-US" sz="3200" dirty="0"/>
-          </a:p>
-        </p:txBody>
-      </p:sp>
-      <p:sp>
-        <p:nvSpPr>
-          <p:cNvPr id="6" name="Text 3"/>
-          <p:cNvSpPr/>
-          <p:nvPr/>
-        </p:nvSpPr>
-        <p:spPr>
-          <a:xfrm>
-            <a:off x="2697480" y="2240280"/>
-            <a:ext cx="9174175" cy="4206240"/>
+            <a:off x="5349240" y="1783080"/>
+            <a:ext cx="6522415" cy="4663440"/>
           </a:xfrm>
           <a:prstGeom prst="rect">
             <a:avLst/>
@@ -12176,7 +12288,7 @@
               <a:buNone/>
             </a:pPr>
             <a:r>
-              <a:rPr lang="en-US" sz="4000" i="1" dirty="0">
+              <a:rPr lang="en-US" sz="4000" b="1" dirty="0">
                 <a:solidFill>
                   <a:srgbClr val="111111"/>
                 </a:solidFill>
@@ -12184,7 +12296,7 @@
                 <a:ea typeface="Times New Roman" pitchFamily="34" charset="-122"/>
                 <a:cs typeface="Times New Roman" pitchFamily="34" charset="-120"/>
               </a:rPr>
-              <a:t>The cycle has the following components:</a:t>
+              <a:t>Topic: Circulation of Water in Nature</a:t>
             </a:r>
             <a:endParaRPr lang="en-US" sz="4000" dirty="0"/>
           </a:p>
@@ -12204,8 +12316,11 @@
                 <a:ea typeface="Times New Roman" pitchFamily="34" charset="-122"/>
                 <a:cs typeface="Times New Roman" pitchFamily="34" charset="-120"/>
               </a:rPr>
-              <a:t>Evaporation: </a:t>
-            </a:r>
+              <a:t>Sub-topic: The Hydrological Cycle</a:t>
+            </a:r>
+            <a:endParaRPr lang="en-US" sz="4000" dirty="0"/>
+          </a:p>
+          <a:p>
             <a:pPr algn="l" indent="0" marL="0">
               <a:spcAft>
                 <a:spcPts val="800"/>
@@ -12213,52 +12328,15 @@
               <a:buNone/>
             </a:pPr>
             <a:r>
-              <a:rPr lang="en-US" sz="4000" dirty="0">
-                <a:solidFill>
-                  <a:srgbClr val="111111"/>
+              <a:rPr lang="en-US" sz="4000" b="1" dirty="0">
+                <a:solidFill>
+                  <a:srgbClr val="990011"/>
                 </a:solidFill>
                 <a:latin typeface="Times New Roman" pitchFamily="34" charset="0"/>
                 <a:ea typeface="Times New Roman" pitchFamily="34" charset="-122"/>
                 <a:cs typeface="Times New Roman" pitchFamily="34" charset="-120"/>
               </a:rPr>
-              <a:t>The Sun heats the water of seas, lakes and rivers and turns it into vapour.</a:t>
-            </a:r>
-            <a:endParaRPr lang="en-US" sz="4000" dirty="0"/>
-          </a:p>
-          <a:p>
-            <a:pPr algn="l" indent="0" marL="0">
-              <a:spcAft>
-                <a:spcPts val="800"/>
-              </a:spcAft>
-              <a:buNone/>
-            </a:pPr>
-            <a:r>
-              <a:rPr lang="en-US" sz="4000" b="1" dirty="0">
-                <a:solidFill>
-                  <a:srgbClr val="111111"/>
-                </a:solidFill>
-                <a:latin typeface="Times New Roman" pitchFamily="34" charset="0"/>
-                <a:ea typeface="Times New Roman" pitchFamily="34" charset="-122"/>
-                <a:cs typeface="Times New Roman" pitchFamily="34" charset="-120"/>
-              </a:rPr>
-              <a:t>Condensation: </a:t>
-            </a:r>
-            <a:pPr algn="l" indent="0" marL="0">
-              <a:spcAft>
-                <a:spcPts val="800"/>
-              </a:spcAft>
-              <a:buNone/>
-            </a:pPr>
-            <a:r>
-              <a:rPr lang="en-US" sz="4000" dirty="0">
-                <a:solidFill>
-                  <a:srgbClr val="111111"/>
-                </a:solidFill>
-                <a:latin typeface="Times New Roman" pitchFamily="34" charset="0"/>
-                <a:ea typeface="Times New Roman" pitchFamily="34" charset="-122"/>
-                <a:cs typeface="Times New Roman" pitchFamily="34" charset="-120"/>
-              </a:rPr>
-              <a:t>The water vapour cools and forms clouds.</a:t>
+              <a:t>Lesson 39: The Hydrological Cycle</a:t>
             </a:r>
             <a:endParaRPr lang="en-US" sz="4000" dirty="0"/>
           </a:p>
@@ -12393,7 +12471,7 @@
         <p:spPr>
           <a:xfrm>
             <a:off x="0" y="658368"/>
-            <a:ext cx="3840480" cy="5833872"/>
+            <a:ext cx="2468880" cy="5833872"/>
           </a:xfrm>
           <a:prstGeom prst="rect">
             <a:avLst/>
@@ -12408,8 +12486,8 @@
         </p:nvSpPr>
         <p:spPr>
           <a:xfrm>
-            <a:off x="4069080" y="1005840"/>
-            <a:ext cx="7802575" cy="731520"/>
+            <a:off x="2697480" y="1005840"/>
+            <a:ext cx="9174175" cy="731520"/>
           </a:xfrm>
           <a:prstGeom prst="rect">
             <a:avLst/>
@@ -12435,7 +12513,7 @@
                 <a:ea typeface="Times New Roman" pitchFamily="34" charset="-122"/>
                 <a:cs typeface="Times New Roman" pitchFamily="34" charset="-120"/>
               </a:rPr>
-              <a:t>1. The Hydrological Cycle</a:t>
+              <a:t>DEFINITIONS</a:t>
             </a:r>
             <a:endParaRPr lang="en-US" sz="3600" dirty="0"/>
           </a:p>
@@ -12449,47 +12527,8 @@
         </p:nvSpPr>
         <p:spPr>
           <a:xfrm>
-            <a:off x="4069080" y="1737360"/>
-            <a:ext cx="7802575" cy="457200"/>
-          </a:xfrm>
-          <a:prstGeom prst="rect">
-            <a:avLst/>
-          </a:prstGeom>
-          <a:noFill/>
-          <a:ln/>
-        </p:spPr>
-        <p:txBody>
-          <a:bodyPr wrap="square" lIns="0" tIns="0" rIns="0" bIns="0" rtlCol="0" anchor="ctr"/>
-          <a:lstStyle/>
-          <a:p>
-            <a:pPr algn="l" indent="0" marL="0">
-              <a:buNone/>
-            </a:pPr>
-            <a:r>
-              <a:rPr lang="en-US" sz="3200" b="1" dirty="0">
-                <a:solidFill>
-                  <a:srgbClr val="990011"/>
-                </a:solidFill>
-                <a:latin typeface="Times New Roman" pitchFamily="34" charset="0"/>
-                <a:ea typeface="Times New Roman" pitchFamily="34" charset="-122"/>
-                <a:cs typeface="Times New Roman" pitchFamily="34" charset="-120"/>
-              </a:rPr>
-              <a:t>B) Components (continued)</a:t>
-            </a:r>
-            <a:endParaRPr lang="en-US" sz="3200" dirty="0"/>
-          </a:p>
-        </p:txBody>
-      </p:sp>
-      <p:sp>
-        <p:nvSpPr>
-          <p:cNvPr id="6" name="Text 3"/>
-          <p:cNvSpPr/>
-          <p:nvPr/>
-        </p:nvSpPr>
-        <p:spPr>
-          <a:xfrm>
-            <a:off x="4069080" y="2240280"/>
-            <a:ext cx="7802575" cy="4206240"/>
+            <a:off x="2697480" y="1783080"/>
+            <a:ext cx="9174175" cy="4663440"/>
           </a:xfrm>
           <a:prstGeom prst="rect">
             <a:avLst/>
@@ -12508,7 +12547,7 @@
               <a:buNone/>
             </a:pPr>
             <a:r>
-              <a:rPr lang="en-US" sz="4000" b="1" dirty="0">
+              <a:rPr lang="en-US" sz="4000" i="1" dirty="0">
                 <a:solidFill>
                   <a:srgbClr val="111111"/>
                 </a:solidFill>
@@ -12516,8 +12555,11 @@
                 <a:ea typeface="Times New Roman" pitchFamily="34" charset="-122"/>
                 <a:cs typeface="Times New Roman" pitchFamily="34" charset="-120"/>
               </a:rPr>
-              <a:t>Precipitation: </a:t>
-            </a:r>
+              <a:t>The key terms of this lesson are defined as follows:</a:t>
+            </a:r>
+            <a:endParaRPr lang="en-US" sz="4000" dirty="0"/>
+          </a:p>
+          <a:p>
             <a:pPr algn="l" indent="0" marL="0">
               <a:spcAft>
                 <a:spcPts val="800"/>
@@ -12525,7 +12567,7 @@
               <a:buNone/>
             </a:pPr>
             <a:r>
-              <a:rPr lang="en-US" sz="4000" dirty="0">
+              <a:rPr lang="en-US" sz="4000" b="1" dirty="0">
                 <a:solidFill>
                   <a:srgbClr val="111111"/>
                 </a:solidFill>
@@ -12533,11 +12575,8 @@
                 <a:ea typeface="Times New Roman" pitchFamily="34" charset="-122"/>
                 <a:cs typeface="Times New Roman" pitchFamily="34" charset="-120"/>
               </a:rPr>
-              <a:t>Water falls from the clouds as rain.</a:t>
-            </a:r>
-            <a:endParaRPr lang="en-US" sz="4000" dirty="0"/>
-          </a:p>
-          <a:p>
+              <a:t>Hydrological cycle: </a:t>
+            </a:r>
             <a:pPr algn="l" indent="0" marL="0">
               <a:spcAft>
                 <a:spcPts val="800"/>
@@ -12545,7 +12584,7 @@
               <a:buNone/>
             </a:pPr>
             <a:r>
-              <a:rPr lang="en-US" sz="4000" b="1" dirty="0">
+              <a:rPr lang="en-US" sz="4000" dirty="0">
                 <a:solidFill>
                   <a:srgbClr val="111111"/>
                 </a:solidFill>
@@ -12553,8 +12592,11 @@
                 <a:ea typeface="Times New Roman" pitchFamily="34" charset="-122"/>
                 <a:cs typeface="Times New Roman" pitchFamily="34" charset="-120"/>
               </a:rPr>
-              <a:t>Runoff and infiltration: </a:t>
-            </a:r>
+              <a:t>It is the continuous movement of water between the sea, the atmosphere and the land.</a:t>
+            </a:r>
+            <a:endParaRPr lang="en-US" sz="4000" dirty="0"/>
+          </a:p>
+          <a:p>
             <a:pPr algn="l" indent="0" marL="0">
               <a:spcAft>
                 <a:spcPts val="800"/>
@@ -12562,7 +12604,7 @@
               <a:buNone/>
             </a:pPr>
             <a:r>
-              <a:rPr lang="en-US" sz="4000" dirty="0">
+              <a:rPr lang="en-US" sz="4000" b="1" dirty="0">
                 <a:solidFill>
                   <a:srgbClr val="111111"/>
                 </a:solidFill>
@@ -12570,7 +12612,24 @@
                 <a:ea typeface="Times New Roman" pitchFamily="34" charset="-122"/>
                 <a:cs typeface="Times New Roman" pitchFamily="34" charset="-120"/>
               </a:rPr>
-              <a:t>Rainwater flows over the ground to rivers or sinks into the soil and returns to the sea.</a:t>
+              <a:t>Evaporation: </a:t>
+            </a:r>
+            <a:pPr algn="l" indent="0" marL="0">
+              <a:spcAft>
+                <a:spcPts val="800"/>
+              </a:spcAft>
+              <a:buNone/>
+            </a:pPr>
+            <a:r>
+              <a:rPr lang="en-US" sz="4000" dirty="0">
+                <a:solidFill>
+                  <a:srgbClr val="111111"/>
+                </a:solidFill>
+                <a:latin typeface="Times New Roman" pitchFamily="34" charset="0"/>
+                <a:ea typeface="Times New Roman" pitchFamily="34" charset="-122"/>
+                <a:cs typeface="Times New Roman" pitchFamily="34" charset="-120"/>
+              </a:rPr>
+              <a:t>It is the change of liquid water into water vapour.</a:t>
             </a:r>
             <a:endParaRPr lang="en-US" sz="4000" dirty="0"/>
           </a:p>
@@ -12688,48 +12747,9 @@
           </a:p>
         </p:txBody>
       </p:sp>
-      <p:sp>
-        <p:nvSpPr>
-          <p:cNvPr id="3" name="Text 1"/>
-          <p:cNvSpPr/>
-          <p:nvPr/>
-        </p:nvSpPr>
-        <p:spPr>
-          <a:xfrm>
-            <a:off x="457200" y="1005840"/>
-            <a:ext cx="11277295" cy="731520"/>
-          </a:xfrm>
-          <a:prstGeom prst="rect">
-            <a:avLst/>
-          </a:prstGeom>
-          <a:noFill/>
-          <a:ln/>
-        </p:spPr>
-        <p:txBody>
-          <a:bodyPr wrap="square" lIns="0" tIns="0" rIns="0" bIns="0" rtlCol="0" anchor="ctr"/>
-          <a:lstStyle/>
-          <a:p>
-            <a:pPr algn="ctr" indent="0" marL="0">
-              <a:buNone/>
-            </a:pPr>
-            <a:r>
-              <a:rPr lang="en-US" sz="3600" b="1" dirty="0">
-                <a:solidFill>
-                  <a:srgbClr val="990011"/>
-                </a:solidFill>
-                <a:latin typeface="Times New Roman" pitchFamily="34" charset="0"/>
-                <a:ea typeface="Times New Roman" pitchFamily="34" charset="-122"/>
-                <a:cs typeface="Times New Roman" pitchFamily="34" charset="-120"/>
-              </a:rPr>
-              <a:t>1. The Hydrological Cycle</a:t>
-            </a:r>
-            <a:endParaRPr lang="en-US" sz="3600" dirty="0"/>
-          </a:p>
-        </p:txBody>
-      </p:sp>
       <p:pic>
         <p:nvPicPr>
-          <p:cNvPr id="4" name="Image 0" descr="/home/claude/f4/img/v2/water_cycle_last.png">    </p:cNvPr>
+          <p:cNvPr id="3" name="Image 0" descr="/home/claude/f4/img/minesec_sheet.png">    </p:cNvPr>
           <p:cNvPicPr>
             <a:picLocks noChangeAspect="1"/>
           </p:cNvPicPr>
@@ -12743,8 +12763,8 @@
         </p:blipFill>
         <p:spPr>
           <a:xfrm>
-            <a:off x="629930" y="1783080"/>
-            <a:ext cx="10931835" cy="4270248"/>
+            <a:off x="0" y="658368"/>
+            <a:ext cx="5120640" cy="5833872"/>
           </a:xfrm>
           <a:prstGeom prst="rect">
             <a:avLst/>
@@ -12753,14 +12773,14 @@
       </p:pic>
       <p:sp>
         <p:nvSpPr>
-          <p:cNvPr id="5" name="Text 2"/>
+          <p:cNvPr id="4" name="Text 1"/>
           <p:cNvSpPr/>
           <p:nvPr/>
         </p:nvSpPr>
         <p:spPr>
           <a:xfrm>
-            <a:off x="457200" y="6089904"/>
-            <a:ext cx="11277295" cy="347472"/>
+            <a:off x="5349240" y="1005840"/>
+            <a:ext cx="6522415" cy="731520"/>
           </a:xfrm>
           <a:prstGeom prst="rect">
             <a:avLst/>
@@ -12769,24 +12789,122 @@
           <a:ln/>
         </p:spPr>
         <p:txBody>
-          <a:bodyPr wrap="square" lIns="0" tIns="0" rIns="0" bIns="0" rtlCol="0" anchor="ctr"/>
+          <a:bodyPr wrap="square" lIns="0" tIns="0" rIns="0" bIns="0" rtlCol="0" anchor="ctr">
+            <a:normAutofit/>
+          </a:bodyPr>
           <a:lstStyle/>
           <a:p>
             <a:pPr algn="ctr" indent="0" marL="0">
               <a:buNone/>
             </a:pPr>
             <a:r>
-              <a:rPr lang="en-US" sz="1800" i="1" dirty="0">
-                <a:solidFill>
-                  <a:srgbClr val="555555"/>
+              <a:rPr lang="en-US" sz="3600" b="1" dirty="0">
+                <a:solidFill>
+                  <a:srgbClr val="990011"/>
                 </a:solidFill>
                 <a:latin typeface="Times New Roman" pitchFamily="34" charset="0"/>
                 <a:ea typeface="Times New Roman" pitchFamily="34" charset="-122"/>
                 <a:cs typeface="Times New Roman" pitchFamily="34" charset="-120"/>
               </a:rPr>
-              <a:t>Illustration: the hydrological cycle</a:t>
-            </a:r>
-            <a:endParaRPr lang="en-US" sz="1800" dirty="0"/>
+              <a:t>DEFINITIONS (continued)</a:t>
+            </a:r>
+            <a:endParaRPr lang="en-US" sz="3600" dirty="0"/>
+          </a:p>
+        </p:txBody>
+      </p:sp>
+      <p:sp>
+        <p:nvSpPr>
+          <p:cNvPr id="5" name="Text 2"/>
+          <p:cNvSpPr/>
+          <p:nvPr/>
+        </p:nvSpPr>
+        <p:spPr>
+          <a:xfrm>
+            <a:off x="5349240" y="1783080"/>
+            <a:ext cx="6522415" cy="4663440"/>
+          </a:xfrm>
+          <a:prstGeom prst="rect">
+            <a:avLst/>
+          </a:prstGeom>
+          <a:noFill/>
+          <a:ln/>
+        </p:spPr>
+        <p:txBody>
+          <a:bodyPr wrap="square" lIns="0" tIns="0" rIns="0" bIns="0" rtlCol="0" anchor="t"/>
+          <a:lstStyle/>
+          <a:p>
+            <a:pPr algn="l" indent="0" marL="0">
+              <a:spcAft>
+                <a:spcPts val="800"/>
+              </a:spcAft>
+              <a:buNone/>
+            </a:pPr>
+            <a:r>
+              <a:rPr lang="en-US" sz="4000" b="1" dirty="0">
+                <a:solidFill>
+                  <a:srgbClr val="111111"/>
+                </a:solidFill>
+                <a:latin typeface="Times New Roman" pitchFamily="34" charset="0"/>
+                <a:ea typeface="Times New Roman" pitchFamily="34" charset="-122"/>
+                <a:cs typeface="Times New Roman" pitchFamily="34" charset="-120"/>
+              </a:rPr>
+              <a:t>Transpiration: </a:t>
+            </a:r>
+            <a:pPr algn="l" indent="0" marL="0">
+              <a:spcAft>
+                <a:spcPts val="800"/>
+              </a:spcAft>
+              <a:buNone/>
+            </a:pPr>
+            <a:r>
+              <a:rPr lang="en-US" sz="4000" dirty="0">
+                <a:solidFill>
+                  <a:srgbClr val="111111"/>
+                </a:solidFill>
+                <a:latin typeface="Times New Roman" pitchFamily="34" charset="0"/>
+                <a:ea typeface="Times New Roman" pitchFamily="34" charset="-122"/>
+                <a:cs typeface="Times New Roman" pitchFamily="34" charset="-120"/>
+              </a:rPr>
+              <a:t>It is the loss of water vapour by plants through their leaves.</a:t>
+            </a:r>
+            <a:endParaRPr lang="en-US" sz="4000" dirty="0"/>
+          </a:p>
+          <a:p>
+            <a:pPr algn="l" indent="0" marL="0">
+              <a:spcAft>
+                <a:spcPts val="800"/>
+              </a:spcAft>
+              <a:buNone/>
+            </a:pPr>
+            <a:r>
+              <a:rPr lang="en-US" sz="4000" b="1" dirty="0">
+                <a:solidFill>
+                  <a:srgbClr val="111111"/>
+                </a:solidFill>
+                <a:latin typeface="Times New Roman" pitchFamily="34" charset="0"/>
+                <a:ea typeface="Times New Roman" pitchFamily="34" charset="-122"/>
+                <a:cs typeface="Times New Roman" pitchFamily="34" charset="-120"/>
+              </a:rPr>
+              <a:t>Evapotranspiration: </a:t>
+            </a:r>
+            <a:pPr algn="l" indent="0" marL="0">
+              <a:spcAft>
+                <a:spcPts val="800"/>
+              </a:spcAft>
+              <a:buNone/>
+            </a:pPr>
+            <a:r>
+              <a:rPr lang="en-US" sz="4000" dirty="0">
+                <a:solidFill>
+                  <a:srgbClr val="111111"/>
+                </a:solidFill>
+                <a:latin typeface="Times New Roman" pitchFamily="34" charset="0"/>
+                <a:ea typeface="Times New Roman" pitchFamily="34" charset="-122"/>
+                <a:cs typeface="Times New Roman" pitchFamily="34" charset="-120"/>
+              </a:rPr>
+              <a:t>It is the total loss of water by evaporation and transpiration.</a:t>
+            </a:r>
+            <a:endParaRPr lang="en-US" sz="4000" dirty="0"/>
           </a:p>
         </p:txBody>
       </p:sp>
@@ -12902,9 +13020,129 @@
           </a:p>
         </p:txBody>
       </p:sp>
+      <p:sp>
+        <p:nvSpPr>
+          <p:cNvPr id="3" name="Text 1"/>
+          <p:cNvSpPr/>
+          <p:nvPr/>
+        </p:nvSpPr>
+        <p:spPr>
+          <a:xfrm>
+            <a:off x="365760" y="1005840"/>
+            <a:ext cx="11460175" cy="731520"/>
+          </a:xfrm>
+          <a:prstGeom prst="rect">
+            <a:avLst/>
+          </a:prstGeom>
+          <a:noFill/>
+          <a:ln/>
+        </p:spPr>
+        <p:txBody>
+          <a:bodyPr wrap="square" lIns="0" tIns="0" rIns="0" bIns="0" rtlCol="0" anchor="ctr">
+            <a:normAutofit/>
+          </a:bodyPr>
+          <a:lstStyle/>
+          <a:p>
+            <a:pPr algn="ctr" indent="0" marL="0">
+              <a:buNone/>
+            </a:pPr>
+            <a:r>
+              <a:rPr lang="en-US" sz="3600" b="1" dirty="0">
+                <a:solidFill>
+                  <a:srgbClr val="990011"/>
+                </a:solidFill>
+                <a:latin typeface="Times New Roman" pitchFamily="34" charset="0"/>
+                <a:ea typeface="Times New Roman" pitchFamily="34" charset="-122"/>
+                <a:cs typeface="Times New Roman" pitchFamily="34" charset="-120"/>
+              </a:rPr>
+              <a:t>1. Meaning: Components of the Hydrological Cycle</a:t>
+            </a:r>
+            <a:endParaRPr lang="en-US" sz="3600" dirty="0"/>
+          </a:p>
+        </p:txBody>
+      </p:sp>
+      <p:sp>
+        <p:nvSpPr>
+          <p:cNvPr id="4" name="Text 2"/>
+          <p:cNvSpPr/>
+          <p:nvPr/>
+        </p:nvSpPr>
+        <p:spPr>
+          <a:xfrm>
+            <a:off x="365760" y="1783080"/>
+            <a:ext cx="4846320" cy="4617720"/>
+          </a:xfrm>
+          <a:prstGeom prst="rect">
+            <a:avLst/>
+          </a:prstGeom>
+          <a:noFill/>
+          <a:ln/>
+        </p:spPr>
+        <p:txBody>
+          <a:bodyPr wrap="square" lIns="0" tIns="0" rIns="0" bIns="0" rtlCol="0" anchor="t"/>
+          <a:lstStyle/>
+          <a:p>
+            <a:pPr algn="l" indent="0" marL="0">
+              <a:spcAft>
+                <a:spcPts val="800"/>
+              </a:spcAft>
+              <a:buNone/>
+            </a:pPr>
+            <a:r>
+              <a:rPr lang="en-US" sz="3600" i="1" dirty="0">
+                <a:solidFill>
+                  <a:srgbClr val="111111"/>
+                </a:solidFill>
+                <a:latin typeface="Times New Roman" pitchFamily="34" charset="0"/>
+                <a:ea typeface="Times New Roman" pitchFamily="34" charset="-122"/>
+                <a:cs typeface="Times New Roman" pitchFamily="34" charset="-120"/>
+              </a:rPr>
+              <a:t>The hydrological cycle has the following components:</a:t>
+            </a:r>
+            <a:endParaRPr lang="en-US" sz="3600" dirty="0"/>
+          </a:p>
+          <a:p>
+            <a:pPr algn="l" indent="0" marL="0">
+              <a:spcAft>
+                <a:spcPts val="800"/>
+              </a:spcAft>
+              <a:buNone/>
+            </a:pPr>
+            <a:r>
+              <a:rPr lang="en-US" sz="3600" b="1" dirty="0">
+                <a:solidFill>
+                  <a:srgbClr val="111111"/>
+                </a:solidFill>
+                <a:latin typeface="Times New Roman" pitchFamily="34" charset="0"/>
+                <a:ea typeface="Times New Roman" pitchFamily="34" charset="-122"/>
+                <a:cs typeface="Times New Roman" pitchFamily="34" charset="-120"/>
+              </a:rPr>
+              <a:t>Evaporation and transpiration: </a:t>
+            </a:r>
+            <a:pPr algn="l" indent="0" marL="0">
+              <a:spcAft>
+                <a:spcPts val="800"/>
+              </a:spcAft>
+              <a:buNone/>
+            </a:pPr>
+            <a:r>
+              <a:rPr lang="en-US" sz="3600" dirty="0">
+                <a:solidFill>
+                  <a:srgbClr val="111111"/>
+                </a:solidFill>
+                <a:latin typeface="Times New Roman" pitchFamily="34" charset="0"/>
+                <a:ea typeface="Times New Roman" pitchFamily="34" charset="-122"/>
+                <a:cs typeface="Times New Roman" pitchFamily="34" charset="-120"/>
+              </a:rPr>
+              <a:t>The Sun heats seas, lakes, rivers and plants, and water rises as vapour.</a:t>
+            </a:r>
+            <a:endParaRPr lang="en-US" sz="3600" dirty="0"/>
+          </a:p>
+        </p:txBody>
+      </p:sp>
       <p:pic>
         <p:nvPicPr>
-          <p:cNvPr id="3" name="Image 0" descr="/home/claude/f4/img/minesec_sheet.png">    </p:cNvPr>
+          <p:cNvPr id="5" name="Image 0" descr="/home/claude/f4/img/v2/water_cycle_last.png">    </p:cNvPr>
           <p:cNvPicPr>
             <a:picLocks noChangeAspect="1"/>
           </p:cNvPicPr>
@@ -12918,8 +13156,8 @@
         </p:blipFill>
         <p:spPr>
           <a:xfrm>
-            <a:off x="0" y="658368"/>
-            <a:ext cx="5120640" cy="5833872"/>
+            <a:off x="5349240" y="2617506"/>
+            <a:ext cx="6659575" cy="2601397"/>
           </a:xfrm>
           <a:prstGeom prst="rect">
             <a:avLst/>
@@ -12928,14 +13166,14 @@
       </p:pic>
       <p:sp>
         <p:nvSpPr>
-          <p:cNvPr id="4" name="Text 1"/>
+          <p:cNvPr id="6" name="Text 3"/>
           <p:cNvSpPr/>
           <p:nvPr/>
         </p:nvSpPr>
         <p:spPr>
           <a:xfrm>
-            <a:off x="5349240" y="1005840"/>
-            <a:ext cx="6522415" cy="731520"/>
+            <a:off x="5349240" y="6089904"/>
+            <a:ext cx="6659575" cy="347472"/>
           </a:xfrm>
           <a:prstGeom prst="rect">
             <a:avLst/>
@@ -12944,142 +13182,24 @@
           <a:ln/>
         </p:spPr>
         <p:txBody>
-          <a:bodyPr wrap="square" lIns="0" tIns="0" rIns="0" bIns="0" rtlCol="0" anchor="ctr">
-            <a:normAutofit/>
-          </a:bodyPr>
+          <a:bodyPr wrap="square" lIns="0" tIns="0" rIns="0" bIns="0" rtlCol="0" anchor="ctr"/>
           <a:lstStyle/>
           <a:p>
             <a:pPr algn="ctr" indent="0" marL="0">
               <a:buNone/>
             </a:pPr>
             <a:r>
-              <a:rPr lang="en-US" sz="3600" b="1" dirty="0">
-                <a:solidFill>
-                  <a:srgbClr val="990011"/>
+              <a:rPr lang="en-US" sz="1600" i="1" dirty="0">
+                <a:solidFill>
+                  <a:srgbClr val="555555"/>
                 </a:solidFill>
                 <a:latin typeface="Times New Roman" pitchFamily="34" charset="0"/>
                 <a:ea typeface="Times New Roman" pitchFamily="34" charset="-122"/>
                 <a:cs typeface="Times New Roman" pitchFamily="34" charset="-120"/>
               </a:rPr>
-              <a:t>2. The Hydrological Cycle as an Open System</a:t>
-            </a:r>
-            <a:endParaRPr lang="en-US" sz="3600" dirty="0"/>
-          </a:p>
-        </p:txBody>
-      </p:sp>
-      <p:sp>
-        <p:nvSpPr>
-          <p:cNvPr id="5" name="Text 2"/>
-          <p:cNvSpPr/>
-          <p:nvPr/>
-        </p:nvSpPr>
-        <p:spPr>
-          <a:xfrm>
-            <a:off x="5349240" y="1783080"/>
-            <a:ext cx="6522415" cy="4663440"/>
-          </a:xfrm>
-          <a:prstGeom prst="rect">
-            <a:avLst/>
-          </a:prstGeom>
-          <a:noFill/>
-          <a:ln/>
-        </p:spPr>
-        <p:txBody>
-          <a:bodyPr wrap="square" lIns="0" tIns="0" rIns="0" bIns="0" rtlCol="0" anchor="t"/>
-          <a:lstStyle/>
-          <a:p>
-            <a:pPr algn="l" indent="0" marL="0">
-              <a:spcAft>
-                <a:spcPts val="800"/>
-              </a:spcAft>
-              <a:buNone/>
-            </a:pPr>
-            <a:r>
-              <a:rPr lang="en-US" sz="4000" i="1" dirty="0">
-                <a:solidFill>
-                  <a:srgbClr val="111111"/>
-                </a:solidFill>
-                <a:latin typeface="Times New Roman" pitchFamily="34" charset="0"/>
-                <a:ea typeface="Times New Roman" pitchFamily="34" charset="-122"/>
-                <a:cs typeface="Times New Roman" pitchFamily="34" charset="-120"/>
-              </a:rPr>
-              <a:t>A drainage basin works as an open system as follows:</a:t>
-            </a:r>
-            <a:endParaRPr lang="en-US" sz="4000" dirty="0"/>
-          </a:p>
-          <a:p>
-            <a:pPr algn="l" indent="0" marL="0">
-              <a:spcAft>
-                <a:spcPts val="800"/>
-              </a:spcAft>
-              <a:buNone/>
-            </a:pPr>
-            <a:r>
-              <a:rPr lang="en-US" sz="4000" b="1" dirty="0">
-                <a:solidFill>
-                  <a:srgbClr val="111111"/>
-                </a:solidFill>
-                <a:latin typeface="Times New Roman" pitchFamily="34" charset="0"/>
-                <a:ea typeface="Times New Roman" pitchFamily="34" charset="-122"/>
-                <a:cs typeface="Times New Roman" pitchFamily="34" charset="-120"/>
-              </a:rPr>
-              <a:t>Input: </a:t>
-            </a:r>
-            <a:pPr algn="l" indent="0" marL="0">
-              <a:spcAft>
-                <a:spcPts val="800"/>
-              </a:spcAft>
-              <a:buNone/>
-            </a:pPr>
-            <a:r>
-              <a:rPr lang="en-US" sz="4000" dirty="0">
-                <a:solidFill>
-                  <a:srgbClr val="111111"/>
-                </a:solidFill>
-                <a:latin typeface="Times New Roman" pitchFamily="34" charset="0"/>
-                <a:ea typeface="Times New Roman" pitchFamily="34" charset="-122"/>
-                <a:cs typeface="Times New Roman" pitchFamily="34" charset="-120"/>
-              </a:rPr>
-              <a:t>Water enters the basin as precipitation.</a:t>
-            </a:r>
-            <a:endParaRPr lang="en-US" sz="4000" dirty="0"/>
-          </a:p>
-          <a:p>
-            <a:pPr algn="l" indent="0" marL="0">
-              <a:spcAft>
-                <a:spcPts val="800"/>
-              </a:spcAft>
-              <a:buNone/>
-            </a:pPr>
-            <a:r>
-              <a:rPr lang="en-US" sz="4000" b="1" dirty="0">
-                <a:solidFill>
-                  <a:srgbClr val="111111"/>
-                </a:solidFill>
-                <a:latin typeface="Times New Roman" pitchFamily="34" charset="0"/>
-                <a:ea typeface="Times New Roman" pitchFamily="34" charset="-122"/>
-                <a:cs typeface="Times New Roman" pitchFamily="34" charset="-120"/>
-              </a:rPr>
-              <a:t>Stores: </a:t>
-            </a:r>
-            <a:pPr algn="l" indent="0" marL="0">
-              <a:spcAft>
-                <a:spcPts val="800"/>
-              </a:spcAft>
-              <a:buNone/>
-            </a:pPr>
-            <a:r>
-              <a:rPr lang="en-US" sz="4000" dirty="0">
-                <a:solidFill>
-                  <a:srgbClr val="111111"/>
-                </a:solidFill>
-                <a:latin typeface="Times New Roman" pitchFamily="34" charset="0"/>
-                <a:ea typeface="Times New Roman" pitchFamily="34" charset="-122"/>
-                <a:cs typeface="Times New Roman" pitchFamily="34" charset="-120"/>
-              </a:rPr>
-              <a:t>Water is stored in the soil, lakes, rivers, plants and rocks.</a:t>
-            </a:r>
-            <a:endParaRPr lang="en-US" sz="4000" dirty="0"/>
+              <a:t>Illustration: the hydrological cycle</a:t>
+            </a:r>
+            <a:endParaRPr lang="en-US" sz="1600" dirty="0"/>
           </a:p>
         </p:txBody>
       </p:sp>
@@ -13212,7 +13332,7 @@
         <p:spPr>
           <a:xfrm>
             <a:off x="0" y="658368"/>
-            <a:ext cx="5120640" cy="5833872"/>
+            <a:ext cx="2468880" cy="5833872"/>
           </a:xfrm>
           <a:prstGeom prst="rect">
             <a:avLst/>
@@ -13227,8 +13347,8 @@
         </p:nvSpPr>
         <p:spPr>
           <a:xfrm>
-            <a:off x="5349240" y="1005840"/>
-            <a:ext cx="6522415" cy="731520"/>
+            <a:off x="2697480" y="1005840"/>
+            <a:ext cx="9174175" cy="731520"/>
           </a:xfrm>
           <a:prstGeom prst="rect">
             <a:avLst/>
@@ -13254,7 +13374,7 @@
                 <a:ea typeface="Times New Roman" pitchFamily="34" charset="-122"/>
                 <a:cs typeface="Times New Roman" pitchFamily="34" charset="-120"/>
               </a:rPr>
-              <a:t>2. The Hydrological Cycle as an Open System (continued)</a:t>
+              <a:t>1. Meaning: Components of the Hydrological Cycle</a:t>
             </a:r>
             <a:endParaRPr lang="en-US" sz="3600" dirty="0"/>
           </a:p>
@@ -13268,8 +13388,8 @@
         </p:nvSpPr>
         <p:spPr>
           <a:xfrm>
-            <a:off x="5349240" y="1783080"/>
-            <a:ext cx="6522415" cy="4663440"/>
+            <a:off x="2697480" y="1783080"/>
+            <a:ext cx="9174175" cy="4663440"/>
           </a:xfrm>
           <a:prstGeom prst="rect">
             <a:avLst/>
@@ -13296,7 +13416,7 @@
                 <a:ea typeface="Times New Roman" pitchFamily="34" charset="-122"/>
                 <a:cs typeface="Times New Roman" pitchFamily="34" charset="-120"/>
               </a:rPr>
-              <a:t>Outputs: </a:t>
+              <a:t>Condensation: </a:t>
             </a:r>
             <a:pPr algn="l" indent="0" marL="0">
               <a:spcAft>
@@ -13313,7 +13433,81 @@
                 <a:ea typeface="Times New Roman" pitchFamily="34" charset="-122"/>
                 <a:cs typeface="Times New Roman" pitchFamily="34" charset="-120"/>
               </a:rPr>
-              <a:t>Water leaves the basin by evaporation and river flow.</a:t>
+              <a:t>The water vapour rises, cools and forms clouds.</a:t>
+            </a:r>
+            <a:endParaRPr lang="en-US" sz="4000" dirty="0"/>
+          </a:p>
+          <a:p>
+            <a:pPr algn="l" indent="0" marL="0">
+              <a:spcAft>
+                <a:spcPts val="800"/>
+              </a:spcAft>
+              <a:buNone/>
+            </a:pPr>
+            <a:r>
+              <a:rPr lang="en-US" sz="4000" b="1" dirty="0">
+                <a:solidFill>
+                  <a:srgbClr val="111111"/>
+                </a:solidFill>
+                <a:latin typeface="Times New Roman" pitchFamily="34" charset="0"/>
+                <a:ea typeface="Times New Roman" pitchFamily="34" charset="-122"/>
+                <a:cs typeface="Times New Roman" pitchFamily="34" charset="-120"/>
+              </a:rPr>
+              <a:t>Precipitation: </a:t>
+            </a:r>
+            <a:pPr algn="l" indent="0" marL="0">
+              <a:spcAft>
+                <a:spcPts val="800"/>
+              </a:spcAft>
+              <a:buNone/>
+            </a:pPr>
+            <a:r>
+              <a:rPr lang="en-US" sz="4000" dirty="0">
+                <a:solidFill>
+                  <a:srgbClr val="111111"/>
+                </a:solidFill>
+                <a:latin typeface="Times New Roman" pitchFamily="34" charset="0"/>
+                <a:ea typeface="Times New Roman" pitchFamily="34" charset="-122"/>
+                <a:cs typeface="Times New Roman" pitchFamily="34" charset="-120"/>
+              </a:rPr>
+              <a:t>Water falls from the clouds as rain, hail or snow.</a:t>
+            </a:r>
+            <a:endParaRPr lang="en-US" sz="4000" dirty="0"/>
+          </a:p>
+          <a:p>
+            <a:pPr algn="l" indent="0" marL="0">
+              <a:spcAft>
+                <a:spcPts val="800"/>
+              </a:spcAft>
+              <a:buNone/>
+            </a:pPr>
+            <a:r>
+              <a:rPr lang="en-US" sz="4000" b="1" dirty="0">
+                <a:solidFill>
+                  <a:srgbClr val="111111"/>
+                </a:solidFill>
+                <a:latin typeface="Times New Roman" pitchFamily="34" charset="0"/>
+                <a:ea typeface="Times New Roman" pitchFamily="34" charset="-122"/>
+                <a:cs typeface="Times New Roman" pitchFamily="34" charset="-120"/>
+              </a:rPr>
+              <a:t>Infiltration and groundwater flow: </a:t>
+            </a:r>
+            <a:pPr algn="l" indent="0" marL="0">
+              <a:spcAft>
+                <a:spcPts val="800"/>
+              </a:spcAft>
+              <a:buNone/>
+            </a:pPr>
+            <a:r>
+              <a:rPr lang="en-US" sz="4000" dirty="0">
+                <a:solidFill>
+                  <a:srgbClr val="111111"/>
+                </a:solidFill>
+                <a:latin typeface="Times New Roman" pitchFamily="34" charset="0"/>
+                <a:ea typeface="Times New Roman" pitchFamily="34" charset="-122"/>
+                <a:cs typeface="Times New Roman" pitchFamily="34" charset="-120"/>
+              </a:rPr>
+              <a:t>Some water sinks into the soil and rocks and moves slowly underground.</a:t>
             </a:r>
             <a:endParaRPr lang="en-US" sz="4000" dirty="0"/>
           </a:p>
@@ -13431,48 +13625,9 @@
           </a:p>
         </p:txBody>
       </p:sp>
-      <p:sp>
-        <p:nvSpPr>
-          <p:cNvPr id="3" name="Text 1"/>
-          <p:cNvSpPr/>
-          <p:nvPr/>
-        </p:nvSpPr>
-        <p:spPr>
-          <a:xfrm>
-            <a:off x="457200" y="1005840"/>
-            <a:ext cx="11277295" cy="731520"/>
-          </a:xfrm>
-          <a:prstGeom prst="rect">
-            <a:avLst/>
-          </a:prstGeom>
-          <a:noFill/>
-          <a:ln/>
-        </p:spPr>
-        <p:txBody>
-          <a:bodyPr wrap="square" lIns="0" tIns="0" rIns="0" bIns="0" rtlCol="0" anchor="ctr"/>
-          <a:lstStyle/>
-          <a:p>
-            <a:pPr algn="ctr" indent="0" marL="0">
-              <a:buNone/>
-            </a:pPr>
-            <a:r>
-              <a:rPr lang="en-US" sz="3600" b="1" dirty="0">
-                <a:solidFill>
-                  <a:srgbClr val="990011"/>
-                </a:solidFill>
-                <a:latin typeface="Times New Roman" pitchFamily="34" charset="0"/>
-                <a:ea typeface="Times New Roman" pitchFamily="34" charset="-122"/>
-                <a:cs typeface="Times New Roman" pitchFamily="34" charset="-120"/>
-              </a:rPr>
-              <a:t>2. The Hydrological Cycle as an Open System</a:t>
-            </a:r>
-            <a:endParaRPr lang="en-US" sz="3600" dirty="0"/>
-          </a:p>
-        </p:txBody>
-      </p:sp>
       <p:pic>
         <p:nvPicPr>
-          <p:cNvPr id="4" name="Image 0" descr="/home/claude/f4/img/v2/open_system_big.png">    </p:cNvPr>
+          <p:cNvPr id="3" name="Image 0" descr="/home/claude/f4/img/minesec_sheet.png">    </p:cNvPr>
           <p:cNvPicPr>
             <a:picLocks noChangeAspect="1"/>
           </p:cNvPicPr>
@@ -13486,8 +13641,8 @@
         </p:blipFill>
         <p:spPr>
           <a:xfrm>
-            <a:off x="629930" y="1783080"/>
-            <a:ext cx="10931835" cy="4270248"/>
+            <a:off x="0" y="658368"/>
+            <a:ext cx="5120640" cy="5833872"/>
           </a:xfrm>
           <a:prstGeom prst="rect">
             <a:avLst/>
@@ -13496,14 +13651,14 @@
       </p:pic>
       <p:sp>
         <p:nvSpPr>
-          <p:cNvPr id="5" name="Text 2"/>
+          <p:cNvPr id="4" name="Text 1"/>
           <p:cNvSpPr/>
           <p:nvPr/>
         </p:nvSpPr>
         <p:spPr>
           <a:xfrm>
-            <a:off x="457200" y="6089904"/>
-            <a:ext cx="11277295" cy="347472"/>
+            <a:off x="5349240" y="1005840"/>
+            <a:ext cx="6522415" cy="731520"/>
           </a:xfrm>
           <a:prstGeom prst="rect">
             <a:avLst/>
@@ -13512,24 +13667,85 @@
           <a:ln/>
         </p:spPr>
         <p:txBody>
-          <a:bodyPr wrap="square" lIns="0" tIns="0" rIns="0" bIns="0" rtlCol="0" anchor="ctr"/>
+          <a:bodyPr wrap="square" lIns="0" tIns="0" rIns="0" bIns="0" rtlCol="0" anchor="ctr">
+            <a:normAutofit/>
+          </a:bodyPr>
           <a:lstStyle/>
           <a:p>
             <a:pPr algn="ctr" indent="0" marL="0">
               <a:buNone/>
             </a:pPr>
             <a:r>
-              <a:rPr lang="en-US" sz="1800" i="1" dirty="0">
-                <a:solidFill>
-                  <a:srgbClr val="555555"/>
+              <a:rPr lang="en-US" sz="3600" b="1" dirty="0">
+                <a:solidFill>
+                  <a:srgbClr val="990011"/>
                 </a:solidFill>
                 <a:latin typeface="Times New Roman" pitchFamily="34" charset="0"/>
                 <a:ea typeface="Times New Roman" pitchFamily="34" charset="-122"/>
                 <a:cs typeface="Times New Roman" pitchFamily="34" charset="-120"/>
               </a:rPr>
-              <a:t>Illustration: the drainage basin as an open system</a:t>
-            </a:r>
-            <a:endParaRPr lang="en-US" sz="1800" dirty="0"/>
+              <a:t>1. Meaning: Components of the Hydrological Cycle (continued)</a:t>
+            </a:r>
+            <a:endParaRPr lang="en-US" sz="3600" dirty="0"/>
+          </a:p>
+        </p:txBody>
+      </p:sp>
+      <p:sp>
+        <p:nvSpPr>
+          <p:cNvPr id="5" name="Text 2"/>
+          <p:cNvSpPr/>
+          <p:nvPr/>
+        </p:nvSpPr>
+        <p:spPr>
+          <a:xfrm>
+            <a:off x="5349240" y="1783080"/>
+            <a:ext cx="6522415" cy="4663440"/>
+          </a:xfrm>
+          <a:prstGeom prst="rect">
+            <a:avLst/>
+          </a:prstGeom>
+          <a:noFill/>
+          <a:ln/>
+        </p:spPr>
+        <p:txBody>
+          <a:bodyPr wrap="square" lIns="0" tIns="0" rIns="0" bIns="0" rtlCol="0" anchor="t"/>
+          <a:lstStyle/>
+          <a:p>
+            <a:pPr algn="l" indent="0" marL="0">
+              <a:spcAft>
+                <a:spcPts val="800"/>
+              </a:spcAft>
+              <a:buNone/>
+            </a:pPr>
+            <a:r>
+              <a:rPr lang="en-US" sz="4000" b="1" dirty="0">
+                <a:solidFill>
+                  <a:srgbClr val="111111"/>
+                </a:solidFill>
+                <a:latin typeface="Times New Roman" pitchFamily="34" charset="0"/>
+                <a:ea typeface="Times New Roman" pitchFamily="34" charset="-122"/>
+                <a:cs typeface="Times New Roman" pitchFamily="34" charset="-120"/>
+              </a:rPr>
+              <a:t>Surface runoff: </a:t>
+            </a:r>
+            <a:pPr algn="l" indent="0" marL="0">
+              <a:spcAft>
+                <a:spcPts val="800"/>
+              </a:spcAft>
+              <a:buNone/>
+            </a:pPr>
+            <a:r>
+              <a:rPr lang="en-US" sz="4000" dirty="0">
+                <a:solidFill>
+                  <a:srgbClr val="111111"/>
+                </a:solidFill>
+                <a:latin typeface="Times New Roman" pitchFamily="34" charset="0"/>
+                <a:ea typeface="Times New Roman" pitchFamily="34" charset="-122"/>
+                <a:cs typeface="Times New Roman" pitchFamily="34" charset="-120"/>
+              </a:rPr>
+              <a:t>Some water flows over the ground into rivers, which carry it back to the sea.</a:t>
+            </a:r>
+            <a:endParaRPr lang="en-US" sz="4000" dirty="0"/>
           </a:p>
         </p:txBody>
       </p:sp>
@@ -13639,15 +13855,135 @@
                 <a:ea typeface="Calibri" pitchFamily="34" charset="-122"/>
                 <a:cs typeface="Calibri" pitchFamily="34" charset="-120"/>
               </a:rPr>
-              <a:t>FORMATIVE EVALUATION</a:t>
+              <a:t>BOARD SUMMARY</a:t>
             </a:r>
             <a:endParaRPr lang="en-US" sz="1400" dirty="0"/>
+          </a:p>
+        </p:txBody>
+      </p:sp>
+      <p:sp>
+        <p:nvSpPr>
+          <p:cNvPr id="3" name="Text 1"/>
+          <p:cNvSpPr/>
+          <p:nvPr/>
+        </p:nvSpPr>
+        <p:spPr>
+          <a:xfrm>
+            <a:off x="365760" y="1005840"/>
+            <a:ext cx="11460175" cy="731520"/>
+          </a:xfrm>
+          <a:prstGeom prst="rect">
+            <a:avLst/>
+          </a:prstGeom>
+          <a:noFill/>
+          <a:ln/>
+        </p:spPr>
+        <p:txBody>
+          <a:bodyPr wrap="square" lIns="0" tIns="0" rIns="0" bIns="0" rtlCol="0" anchor="ctr">
+            <a:normAutofit/>
+          </a:bodyPr>
+          <a:lstStyle/>
+          <a:p>
+            <a:pPr algn="ctr" indent="0" marL="0">
+              <a:buNone/>
+            </a:pPr>
+            <a:r>
+              <a:rPr lang="en-US" sz="3600" b="1" dirty="0">
+                <a:solidFill>
+                  <a:srgbClr val="990011"/>
+                </a:solidFill>
+                <a:latin typeface="Times New Roman" pitchFamily="34" charset="0"/>
+                <a:ea typeface="Times New Roman" pitchFamily="34" charset="-122"/>
+                <a:cs typeface="Times New Roman" pitchFamily="34" charset="-120"/>
+              </a:rPr>
+              <a:t>2. The Flow Diagram as an Open System</a:t>
+            </a:r>
+            <a:endParaRPr lang="en-US" sz="3600" dirty="0"/>
+          </a:p>
+        </p:txBody>
+      </p:sp>
+      <p:sp>
+        <p:nvSpPr>
+          <p:cNvPr id="4" name="Text 2"/>
+          <p:cNvSpPr/>
+          <p:nvPr/>
+        </p:nvSpPr>
+        <p:spPr>
+          <a:xfrm>
+            <a:off x="365760" y="1783080"/>
+            <a:ext cx="4846320" cy="4617720"/>
+          </a:xfrm>
+          <a:prstGeom prst="rect">
+            <a:avLst/>
+          </a:prstGeom>
+          <a:noFill/>
+          <a:ln/>
+        </p:spPr>
+        <p:txBody>
+          <a:bodyPr wrap="square" lIns="0" tIns="0" rIns="0" bIns="0" rtlCol="0" anchor="t"/>
+          <a:lstStyle/>
+          <a:p>
+            <a:pPr algn="l" indent="0" marL="0">
+              <a:spcAft>
+                <a:spcPts val="800"/>
+              </a:spcAft>
+              <a:buNone/>
+            </a:pPr>
+            <a:r>
+              <a:rPr lang="en-US" sz="3600" i="1" dirty="0">
+                <a:solidFill>
+                  <a:srgbClr val="111111"/>
+                </a:solidFill>
+                <a:latin typeface="Times New Roman" pitchFamily="34" charset="0"/>
+                <a:ea typeface="Times New Roman" pitchFamily="34" charset="-122"/>
+                <a:cs typeface="Times New Roman" pitchFamily="34" charset="-120"/>
+              </a:rPr>
+              <a:t>The drainage basin works as an open system as follows:</a:t>
+            </a:r>
+            <a:endParaRPr lang="en-US" sz="3600" dirty="0"/>
+          </a:p>
+          <a:p>
+            <a:pPr algn="l" indent="0" marL="0">
+              <a:spcAft>
+                <a:spcPts val="800"/>
+              </a:spcAft>
+              <a:buNone/>
+            </a:pPr>
+            <a:r>
+              <a:rPr lang="en-US" sz="3600" b="1" dirty="0">
+                <a:solidFill>
+                  <a:srgbClr val="111111"/>
+                </a:solidFill>
+                <a:latin typeface="Times New Roman" pitchFamily="34" charset="0"/>
+                <a:ea typeface="Times New Roman" pitchFamily="34" charset="-122"/>
+                <a:cs typeface="Times New Roman" pitchFamily="34" charset="-120"/>
+              </a:rPr>
+              <a:t>Inputs: </a:t>
+            </a:r>
+            <a:pPr algn="l" indent="0" marL="0">
+              <a:spcAft>
+                <a:spcPts val="800"/>
+              </a:spcAft>
+              <a:buNone/>
+            </a:pPr>
+            <a:r>
+              <a:rPr lang="en-US" sz="3600" dirty="0">
+                <a:solidFill>
+                  <a:srgbClr val="111111"/>
+                </a:solidFill>
+                <a:latin typeface="Times New Roman" pitchFamily="34" charset="0"/>
+                <a:ea typeface="Times New Roman" pitchFamily="34" charset="-122"/>
+                <a:cs typeface="Times New Roman" pitchFamily="34" charset="-120"/>
+              </a:rPr>
+              <a:t>Water enters the basin as precipitation.</a:t>
+            </a:r>
+            <a:endParaRPr lang="en-US" sz="3600" dirty="0"/>
           </a:p>
         </p:txBody>
       </p:sp>
       <p:pic>
         <p:nvPicPr>
-          <p:cNvPr id="3" name="Image 0" descr="/home/claude/f4/img/minesec_sheet.png">    </p:cNvPr>
+          <p:cNvPr id="5" name="Image 0" descr="/home/claude/f4/img/v2/open_system_big.png">    </p:cNvPr>
           <p:cNvPicPr>
             <a:picLocks noChangeAspect="1"/>
           </p:cNvPicPr>
@@ -13661,8 +13997,8 @@
         </p:blipFill>
         <p:spPr>
           <a:xfrm>
-            <a:off x="0" y="658368"/>
-            <a:ext cx="5120640" cy="5833872"/>
+            <a:off x="5349240" y="2617506"/>
+            <a:ext cx="6659575" cy="2601397"/>
           </a:xfrm>
           <a:prstGeom prst="rect">
             <a:avLst/>
@@ -13671,14 +14007,14 @@
       </p:pic>
       <p:sp>
         <p:nvSpPr>
-          <p:cNvPr id="4" name="Text 1"/>
+          <p:cNvPr id="6" name="Text 3"/>
           <p:cNvSpPr/>
           <p:nvPr/>
         </p:nvSpPr>
         <p:spPr>
           <a:xfrm>
-            <a:off x="5349240" y="1005840"/>
-            <a:ext cx="6522415" cy="731520"/>
+            <a:off x="5349240" y="6089904"/>
+            <a:ext cx="6659575" cy="347472"/>
           </a:xfrm>
           <a:prstGeom prst="rect">
             <a:avLst/>
@@ -13687,68 +14023,24 @@
           <a:ln/>
         </p:spPr>
         <p:txBody>
-          <a:bodyPr wrap="square" lIns="0" tIns="0" rIns="0" bIns="0" rtlCol="0" anchor="ctr">
-            <a:normAutofit/>
-          </a:bodyPr>
+          <a:bodyPr wrap="square" lIns="0" tIns="0" rIns="0" bIns="0" rtlCol="0" anchor="ctr"/>
           <a:lstStyle/>
           <a:p>
             <a:pPr algn="ctr" indent="0" marL="0">
               <a:buNone/>
             </a:pPr>
             <a:r>
-              <a:rPr lang="en-US" sz="3600" b="1" dirty="0">
-                <a:solidFill>
-                  <a:srgbClr val="990011"/>
+              <a:rPr lang="en-US" sz="1600" i="1" dirty="0">
+                <a:solidFill>
+                  <a:srgbClr val="555555"/>
                 </a:solidFill>
                 <a:latin typeface="Times New Roman" pitchFamily="34" charset="0"/>
                 <a:ea typeface="Times New Roman" pitchFamily="34" charset="-122"/>
                 <a:cs typeface="Times New Roman" pitchFamily="34" charset="-120"/>
               </a:rPr>
-              <a:t>Evaluation 1</a:t>
-            </a:r>
-            <a:endParaRPr lang="en-US" sz="3600" dirty="0"/>
-          </a:p>
-        </p:txBody>
-      </p:sp>
-      <p:sp>
-        <p:nvSpPr>
-          <p:cNvPr id="5" name="Text 2"/>
-          <p:cNvSpPr/>
-          <p:nvPr/>
-        </p:nvSpPr>
-        <p:spPr>
-          <a:xfrm>
-            <a:off x="5349240" y="1783080"/>
-            <a:ext cx="6522415" cy="4663440"/>
-          </a:xfrm>
-          <a:prstGeom prst="rect">
-            <a:avLst/>
-          </a:prstGeom>
-          <a:noFill/>
-          <a:ln/>
-        </p:spPr>
-        <p:txBody>
-          <a:bodyPr wrap="square" lIns="0" tIns="0" rIns="0" bIns="0" rtlCol="0" anchor="t"/>
-          <a:lstStyle/>
-          <a:p>
-            <a:pPr algn="l" indent="0" marL="0">
-              <a:spcAft>
-                <a:spcPts val="800"/>
-              </a:spcAft>
-              <a:buNone/>
-            </a:pPr>
-            <a:r>
-              <a:rPr lang="en-US" sz="4000" dirty="0">
-                <a:solidFill>
-                  <a:srgbClr val="111111"/>
-                </a:solidFill>
-                <a:latin typeface="Times New Roman" pitchFamily="34" charset="0"/>
-                <a:ea typeface="Times New Roman" pitchFamily="34" charset="-122"/>
-                <a:cs typeface="Times New Roman" pitchFamily="34" charset="-120"/>
-              </a:rPr>
-              <a:t>What is evaporation?</a:t>
-            </a:r>
-            <a:endParaRPr lang="en-US" sz="4000" dirty="0"/>
+              <a:t>Illustration: the drainage basin as an open system</a:t>
+            </a:r>
+            <a:endParaRPr lang="en-US" sz="1600" dirty="0"/>
           </a:p>
         </p:txBody>
       </p:sp>
@@ -13858,7 +14150,7 @@
                 <a:ea typeface="Calibri" pitchFamily="34" charset="-122"/>
                 <a:cs typeface="Calibri" pitchFamily="34" charset="-120"/>
               </a:rPr>
-              <a:t>FORMATIVE EVALUATION</a:t>
+              <a:t>BOARD SUMMARY</a:t>
             </a:r>
             <a:endParaRPr lang="en-US" sz="1400" dirty="0"/>
           </a:p>
@@ -13881,7 +14173,7 @@
         <p:spPr>
           <a:xfrm>
             <a:off x="0" y="658368"/>
-            <a:ext cx="5120640" cy="5833872"/>
+            <a:ext cx="2468880" cy="5833872"/>
           </a:xfrm>
           <a:prstGeom prst="rect">
             <a:avLst/>
@@ -13896,8 +14188,8 @@
         </p:nvSpPr>
         <p:spPr>
           <a:xfrm>
-            <a:off x="5349240" y="1005840"/>
-            <a:ext cx="6522415" cy="731520"/>
+            <a:off x="2697480" y="1005840"/>
+            <a:ext cx="9174175" cy="731520"/>
           </a:xfrm>
           <a:prstGeom prst="rect">
             <a:avLst/>
@@ -13923,7 +14215,7 @@
                 <a:ea typeface="Times New Roman" pitchFamily="34" charset="-122"/>
                 <a:cs typeface="Times New Roman" pitchFamily="34" charset="-120"/>
               </a:rPr>
-              <a:t>Expected Answer</a:t>
+              <a:t>2. The Flow Diagram as an Open System</a:t>
             </a:r>
             <a:endParaRPr lang="en-US" sz="3600" dirty="0"/>
           </a:p>
@@ -13937,8 +14229,8 @@
         </p:nvSpPr>
         <p:spPr>
           <a:xfrm>
-            <a:off x="5349240" y="1783080"/>
-            <a:ext cx="6522415" cy="4663440"/>
+            <a:off x="2697480" y="1783080"/>
+            <a:ext cx="9174175" cy="4663440"/>
           </a:xfrm>
           <a:prstGeom prst="rect">
             <a:avLst/>
@@ -13957,7 +14249,7 @@
               <a:buNone/>
             </a:pPr>
             <a:r>
-              <a:rPr lang="en-US" sz="4000" dirty="0">
+              <a:rPr lang="en-US" sz="4000" b="1" dirty="0">
                 <a:solidFill>
                   <a:srgbClr val="111111"/>
                 </a:solidFill>
@@ -13965,7 +14257,61 @@
                 <a:ea typeface="Times New Roman" pitchFamily="34" charset="-122"/>
                 <a:cs typeface="Times New Roman" pitchFamily="34" charset="-120"/>
               </a:rPr>
-              <a:t>Water changing into vapour.</a:t>
+              <a:t>Stores: </a:t>
+            </a:r>
+            <a:pPr algn="l" indent="0" marL="0">
+              <a:spcAft>
+                <a:spcPts val="800"/>
+              </a:spcAft>
+              <a:buNone/>
+            </a:pPr>
+            <a:r>
+              <a:rPr lang="en-US" sz="4000" dirty="0">
+                <a:solidFill>
+                  <a:srgbClr val="111111"/>
+                </a:solidFill>
+                <a:latin typeface="Times New Roman" pitchFamily="34" charset="0"/>
+                <a:ea typeface="Times New Roman" pitchFamily="34" charset="-122"/>
+                <a:cs typeface="Times New Roman" pitchFamily="34" charset="-120"/>
+              </a:rPr>
+              <a:t>Water is stored on plants (interception), on the surface, in the soil, in rocks, in lakes and in rivers.</a:t>
+            </a:r>
+            <a:endParaRPr lang="en-US" sz="4000" dirty="0"/>
+          </a:p>
+          <a:p>
+            <a:pPr algn="l" indent="0" marL="0">
+              <a:spcAft>
+                <a:spcPts val="800"/>
+              </a:spcAft>
+              <a:buNone/>
+            </a:pPr>
+            <a:r>
+              <a:rPr lang="en-US" sz="4000" b="1" dirty="0">
+                <a:solidFill>
+                  <a:srgbClr val="111111"/>
+                </a:solidFill>
+                <a:latin typeface="Times New Roman" pitchFamily="34" charset="0"/>
+                <a:ea typeface="Times New Roman" pitchFamily="34" charset="-122"/>
+                <a:cs typeface="Times New Roman" pitchFamily="34" charset="-120"/>
+              </a:rPr>
+              <a:t>Transfers: </a:t>
+            </a:r>
+            <a:pPr algn="l" indent="0" marL="0">
+              <a:spcAft>
+                <a:spcPts val="800"/>
+              </a:spcAft>
+              <a:buNone/>
+            </a:pPr>
+            <a:r>
+              <a:rPr lang="en-US" sz="4000" dirty="0">
+                <a:solidFill>
+                  <a:srgbClr val="111111"/>
+                </a:solidFill>
+                <a:latin typeface="Times New Roman" pitchFamily="34" charset="0"/>
+                <a:ea typeface="Times New Roman" pitchFamily="34" charset="-122"/>
+                <a:cs typeface="Times New Roman" pitchFamily="34" charset="-120"/>
+              </a:rPr>
+              <a:t>Water moves by infiltration, throughflow, groundwater flow and surface runoff.</a:t>
             </a:r>
             <a:endParaRPr lang="en-US" sz="4000" dirty="0"/>
           </a:p>
@@ -14077,7 +14423,7 @@
                 <a:ea typeface="Calibri" pitchFamily="34" charset="-122"/>
                 <a:cs typeface="Calibri" pitchFamily="34" charset="-120"/>
               </a:rPr>
-              <a:t>FORMATIVE EVALUATION</a:t>
+              <a:t>BOARD SUMMARY</a:t>
             </a:r>
             <a:endParaRPr lang="en-US" sz="1400" dirty="0"/>
           </a:p>
@@ -14100,7 +14446,7 @@
         <p:spPr>
           <a:xfrm>
             <a:off x="0" y="658368"/>
-            <a:ext cx="5120640" cy="5833872"/>
+            <a:ext cx="3840480" cy="5833872"/>
           </a:xfrm>
           <a:prstGeom prst="rect">
             <a:avLst/>
@@ -14115,8 +14461,8 @@
         </p:nvSpPr>
         <p:spPr>
           <a:xfrm>
-            <a:off x="5349240" y="1005840"/>
-            <a:ext cx="6522415" cy="731520"/>
+            <a:off x="4069080" y="1005840"/>
+            <a:ext cx="7802575" cy="731520"/>
           </a:xfrm>
           <a:prstGeom prst="rect">
             <a:avLst/>
@@ -14142,7 +14488,7 @@
                 <a:ea typeface="Times New Roman" pitchFamily="34" charset="-122"/>
                 <a:cs typeface="Times New Roman" pitchFamily="34" charset="-120"/>
               </a:rPr>
-              <a:t>Evaluation 2</a:t>
+              <a:t>2. The Flow Diagram as an Open System (continued)</a:t>
             </a:r>
             <a:endParaRPr lang="en-US" sz="3600" dirty="0"/>
           </a:p>
@@ -14156,8 +14502,8 @@
         </p:nvSpPr>
         <p:spPr>
           <a:xfrm>
-            <a:off x="5349240" y="1783080"/>
-            <a:ext cx="6522415" cy="4663440"/>
+            <a:off x="4069080" y="1783080"/>
+            <a:ext cx="7802575" cy="4663440"/>
           </a:xfrm>
           <a:prstGeom prst="rect">
             <a:avLst/>
@@ -14176,7 +14522,7 @@
               <a:buNone/>
             </a:pPr>
             <a:r>
-              <a:rPr lang="en-US" sz="4000" dirty="0">
+              <a:rPr lang="en-US" sz="4000" b="1" dirty="0">
                 <a:solidFill>
                   <a:srgbClr val="111111"/>
                 </a:solidFill>
@@ -14184,7 +14530,61 @@
                 <a:ea typeface="Times New Roman" pitchFamily="34" charset="-122"/>
                 <a:cs typeface="Times New Roman" pitchFamily="34" charset="-120"/>
               </a:rPr>
-              <a:t>Why is a drainage basin an open system?</a:t>
+              <a:t>Outputs: </a:t>
+            </a:r>
+            <a:pPr algn="l" indent="0" marL="0">
+              <a:spcAft>
+                <a:spcPts val="800"/>
+              </a:spcAft>
+              <a:buNone/>
+            </a:pPr>
+            <a:r>
+              <a:rPr lang="en-US" sz="4000" dirty="0">
+                <a:solidFill>
+                  <a:srgbClr val="111111"/>
+                </a:solidFill>
+                <a:latin typeface="Times New Roman" pitchFamily="34" charset="0"/>
+                <a:ea typeface="Times New Roman" pitchFamily="34" charset="-122"/>
+                <a:cs typeface="Times New Roman" pitchFamily="34" charset="-120"/>
+              </a:rPr>
+              <a:t>Water leaves the basin by evapotranspiration and by river flow to the sea.</a:t>
+            </a:r>
+            <a:endParaRPr lang="en-US" sz="4000" dirty="0"/>
+          </a:p>
+          <a:p>
+            <a:pPr algn="l" indent="0" marL="0">
+              <a:spcAft>
+                <a:spcPts val="800"/>
+              </a:spcAft>
+              <a:buNone/>
+            </a:pPr>
+            <a:r>
+              <a:rPr lang="en-US" sz="4000" b="1" dirty="0">
+                <a:solidFill>
+                  <a:srgbClr val="111111"/>
+                </a:solidFill>
+                <a:latin typeface="Times New Roman" pitchFamily="34" charset="0"/>
+                <a:ea typeface="Times New Roman" pitchFamily="34" charset="-122"/>
+                <a:cs typeface="Times New Roman" pitchFamily="34" charset="-120"/>
+              </a:rPr>
+              <a:t>Open system: </a:t>
+            </a:r>
+            <a:pPr algn="l" indent="0" marL="0">
+              <a:spcAft>
+                <a:spcPts val="800"/>
+              </a:spcAft>
+              <a:buNone/>
+            </a:pPr>
+            <a:r>
+              <a:rPr lang="en-US" sz="4000" dirty="0">
+                <a:solidFill>
+                  <a:srgbClr val="111111"/>
+                </a:solidFill>
+                <a:latin typeface="Times New Roman" pitchFamily="34" charset="0"/>
+                <a:ea typeface="Times New Roman" pitchFamily="34" charset="-122"/>
+                <a:cs typeface="Times New Roman" pitchFamily="34" charset="-120"/>
+              </a:rPr>
+              <a:t>It is called open because water enters and leaves it, unlike the global cycle, which is closed.</a:t>
             </a:r>
             <a:endParaRPr lang="en-US" sz="4000" dirty="0"/>
           </a:p>
@@ -14361,7 +14761,7 @@
                 <a:ea typeface="Times New Roman" pitchFamily="34" charset="-122"/>
                 <a:cs typeface="Times New Roman" pitchFamily="34" charset="-120"/>
               </a:rPr>
-              <a:t>Expected Answer</a:t>
+              <a:t>Evaluation 1</a:t>
             </a:r>
             <a:endParaRPr lang="en-US" sz="3600" dirty="0"/>
           </a:p>
@@ -14403,7 +14803,7 @@
                 <a:ea typeface="Times New Roman" pitchFamily="34" charset="-122"/>
                 <a:cs typeface="Times New Roman" pitchFamily="34" charset="-120"/>
               </a:rPr>
-              <a:t>Water enters (rain) and leaves (evaporation, rivers).</a:t>
+              <a:t>What is evaporation?</a:t>
             </a:r>
             <a:endParaRPr lang="en-US" sz="4000" dirty="0"/>
           </a:p>
@@ -14754,7 +15154,7 @@
                 <a:ea typeface="Calibri" pitchFamily="34" charset="-122"/>
                 <a:cs typeface="Calibri" pitchFamily="34" charset="-120"/>
               </a:rPr>
-              <a:t>REMEDIATION</a:t>
+              <a:t>FORMATIVE EVALUATION</a:t>
             </a:r>
             <a:endParaRPr lang="en-US" sz="1400" dirty="0"/>
           </a:p>
@@ -14777,7 +15177,7 @@
         <p:spPr>
           <a:xfrm>
             <a:off x="0" y="658368"/>
-            <a:ext cx="2468880" cy="5833872"/>
+            <a:ext cx="5120640" cy="5833872"/>
           </a:xfrm>
           <a:prstGeom prst="rect">
             <a:avLst/>
@@ -14792,8 +15192,8 @@
         </p:nvSpPr>
         <p:spPr>
           <a:xfrm>
-            <a:off x="2697480" y="1005840"/>
-            <a:ext cx="9174175" cy="731520"/>
+            <a:off x="5349240" y="1005840"/>
+            <a:ext cx="6522415" cy="731520"/>
           </a:xfrm>
           <a:prstGeom prst="rect">
             <a:avLst/>
@@ -14819,7 +15219,7 @@
                 <a:ea typeface="Times New Roman" pitchFamily="34" charset="-122"/>
                 <a:cs typeface="Times New Roman" pitchFamily="34" charset="-120"/>
               </a:rPr>
-              <a:t>Remediation</a:t>
+              <a:t>Expected Answer</a:t>
             </a:r>
             <a:endParaRPr lang="en-US" sz="3600" dirty="0"/>
           </a:p>
@@ -14833,8 +15233,8 @@
         </p:nvSpPr>
         <p:spPr>
           <a:xfrm>
-            <a:off x="2697480" y="1783080"/>
-            <a:ext cx="9174175" cy="4663440"/>
+            <a:off x="5349240" y="1783080"/>
+            <a:ext cx="6522415" cy="4663440"/>
           </a:xfrm>
           <a:prstGeom prst="rect">
             <a:avLst/>
@@ -14853,7 +15253,7 @@
               <a:buNone/>
             </a:pPr>
             <a:r>
-              <a:rPr lang="en-US" sz="4000" b="1" dirty="0">
+              <a:rPr lang="en-US" sz="4000" dirty="0">
                 <a:solidFill>
                   <a:srgbClr val="111111"/>
                 </a:solidFill>
@@ -14861,73 +15261,7 @@
                 <a:ea typeface="Times New Roman" pitchFamily="34" charset="-122"/>
                 <a:cs typeface="Times New Roman" pitchFamily="34" charset="-120"/>
               </a:rPr>
-              <a:t>Fill in the blanks:</a:t>
-            </a:r>
-            <a:endParaRPr lang="en-US" sz="4000" dirty="0"/>
-          </a:p>
-          <a:p>
-            <a:pPr algn="l" marL="342900" indent="-342900">
-              <a:spcAft>
-                <a:spcPts val="800"/>
-              </a:spcAft>
-              <a:buSzPct val="100000"/>
-              <a:buFont typeface="+mj-lt"/>
-              <a:buAutoNum type="arabicPeriod" startAt="1"/>
-            </a:pPr>
-            <a:r>
-              <a:rPr lang="en-US" sz="4000" dirty="0">
-                <a:solidFill>
-                  <a:srgbClr val="111111"/>
-                </a:solidFill>
-                <a:latin typeface="Times New Roman" pitchFamily="34" charset="0"/>
-                <a:ea typeface="Times New Roman" pitchFamily="34" charset="-122"/>
-                <a:cs typeface="Times New Roman" pitchFamily="34" charset="-120"/>
-              </a:rPr>
-              <a:t>Water changing into vapour is ______.</a:t>
-            </a:r>
-            <a:endParaRPr lang="en-US" sz="4000" dirty="0"/>
-          </a:p>
-          <a:p>
-            <a:pPr algn="l" marL="342900" indent="-342900">
-              <a:spcAft>
-                <a:spcPts val="800"/>
-              </a:spcAft>
-              <a:buSzPct val="100000"/>
-              <a:buFont typeface="+mj-lt"/>
-              <a:buAutoNum type="arabicPeriod" startAt="1"/>
-            </a:pPr>
-            <a:r>
-              <a:rPr lang="en-US" sz="4000" dirty="0">
-                <a:solidFill>
-                  <a:srgbClr val="111111"/>
-                </a:solidFill>
-                <a:latin typeface="Times New Roman" pitchFamily="34" charset="0"/>
-                <a:ea typeface="Times New Roman" pitchFamily="34" charset="-122"/>
-                <a:cs typeface="Times New Roman" pitchFamily="34" charset="-120"/>
-              </a:rPr>
-              <a:t>Water flowing on the ground is ______.</a:t>
-            </a:r>
-            <a:endParaRPr lang="en-US" sz="4000" dirty="0"/>
-          </a:p>
-          <a:p>
-            <a:pPr algn="l" marL="342900" indent="-342900">
-              <a:spcAft>
-                <a:spcPts val="800"/>
-              </a:spcAft>
-              <a:buSzPct val="100000"/>
-              <a:buFont typeface="+mj-lt"/>
-              <a:buAutoNum type="arabicPeriod" startAt="1"/>
-            </a:pPr>
-            <a:r>
-              <a:rPr lang="en-US" sz="4000" dirty="0">
-                <a:solidFill>
-                  <a:srgbClr val="111111"/>
-                </a:solidFill>
-                <a:latin typeface="Times New Roman" pitchFamily="34" charset="0"/>
-                <a:ea typeface="Times New Roman" pitchFamily="34" charset="-122"/>
-                <a:cs typeface="Times New Roman" pitchFamily="34" charset="-120"/>
-              </a:rPr>
-              <a:t>Rain falling from clouds is ______.</a:t>
+              <a:t>Water changing into vapour.</a:t>
             </a:r>
             <a:endParaRPr lang="en-US" sz="4000" dirty="0"/>
           </a:p>
@@ -15039,7 +15373,7 @@
                 <a:ea typeface="Calibri" pitchFamily="34" charset="-122"/>
                 <a:cs typeface="Calibri" pitchFamily="34" charset="-120"/>
               </a:rPr>
-              <a:t>HOMEWORK</a:t>
+              <a:t>FORMATIVE EVALUATION</a:t>
             </a:r>
             <a:endParaRPr lang="en-US" sz="1400" dirty="0"/>
           </a:p>
@@ -15104,7 +15438,7 @@
                 <a:ea typeface="Times New Roman" pitchFamily="34" charset="-122"/>
                 <a:cs typeface="Times New Roman" pitchFamily="34" charset="-120"/>
               </a:rPr>
-              <a:t>Homework</a:t>
+              <a:t>Evaluation 2</a:t>
             </a:r>
             <a:endParaRPr lang="en-US" sz="3600" dirty="0"/>
           </a:p>
@@ -15146,7 +15480,7 @@
                 <a:ea typeface="Times New Roman" pitchFamily="34" charset="-122"/>
                 <a:cs typeface="Times New Roman" pitchFamily="34" charset="-120"/>
               </a:rPr>
-              <a:t>Ask your grandparents or an elder whether the dry season is hotter or longer today than when they were young. Write down what they say.</a:t>
+              <a:t>Why is a drainage basin an open system?</a:t>
             </a:r>
             <a:endParaRPr lang="en-US" sz="4000" dirty="0"/>
           </a:p>
@@ -15258,7 +15592,7 @@
                 <a:ea typeface="Calibri" pitchFamily="34" charset="-122"/>
                 <a:cs typeface="Calibri" pitchFamily="34" charset="-120"/>
               </a:rPr>
-              <a:t>NEXT LESSON</a:t>
+              <a:t>FORMATIVE EVALUATION</a:t>
             </a:r>
             <a:endParaRPr lang="en-US" sz="1400" dirty="0"/>
           </a:p>
@@ -15323,7 +15657,7 @@
                 <a:ea typeface="Times New Roman" pitchFamily="34" charset="-122"/>
                 <a:cs typeface="Times New Roman" pitchFamily="34" charset="-120"/>
               </a:rPr>
-              <a:t>Next Lesson</a:t>
+              <a:t>Expected Answer</a:t>
             </a:r>
             <a:endParaRPr lang="en-US" sz="3600" dirty="0"/>
           </a:p>
@@ -15347,17 +15681,17 @@
           <a:ln/>
         </p:spPr>
         <p:txBody>
-          <a:bodyPr wrap="square" lIns="0" tIns="0" rIns="0" bIns="0" rtlCol="0" anchor="ctr"/>
-          <a:lstStyle/>
-          <a:p>
-            <a:pPr algn="ctr" indent="0" marL="0">
+          <a:bodyPr wrap="square" lIns="0" tIns="0" rIns="0" bIns="0" rtlCol="0" anchor="t"/>
+          <a:lstStyle/>
+          <a:p>
+            <a:pPr algn="l" indent="0" marL="0">
               <a:spcAft>
                 <a:spcPts val="800"/>
               </a:spcAft>
               <a:buNone/>
             </a:pPr>
             <a:r>
-              <a:rPr lang="en-US" sz="4000" b="1" dirty="0">
+              <a:rPr lang="en-US" sz="4000" dirty="0">
                 <a:solidFill>
                   <a:srgbClr val="111111"/>
                 </a:solidFill>
@@ -15365,27 +15699,7 @@
                 <a:ea typeface="Times New Roman" pitchFamily="34" charset="-122"/>
                 <a:cs typeface="Times New Roman" pitchFamily="34" charset="-120"/>
               </a:rPr>
-              <a:t>Our next lesson will be on:</a:t>
-            </a:r>
-            <a:endParaRPr lang="en-US" sz="4000" dirty="0"/>
-          </a:p>
-          <a:p>
-            <a:pPr algn="ctr" indent="0" marL="0">
-              <a:spcAft>
-                <a:spcPts val="800"/>
-              </a:spcAft>
-              <a:buNone/>
-            </a:pPr>
-            <a:r>
-              <a:rPr lang="en-US" sz="4000" b="1" dirty="0">
-                <a:solidFill>
-                  <a:srgbClr val="990011"/>
-                </a:solidFill>
-                <a:latin typeface="Times New Roman" pitchFamily="34" charset="0"/>
-                <a:ea typeface="Times New Roman" pitchFamily="34" charset="-122"/>
-                <a:cs typeface="Times New Roman" pitchFamily="34" charset="-120"/>
-              </a:rPr>
-              <a:t>Lesson 40: Global Warming</a:t>
+              <a:t>Water enters (rain) and leaves (evaporation, rivers).</a:t>
             </a:r>
             <a:endParaRPr lang="en-US" sz="4000" dirty="0"/>
           </a:p>
@@ -15497,6 +15811,749 @@
                 <a:ea typeface="Calibri" pitchFamily="34" charset="-122"/>
                 <a:cs typeface="Calibri" pitchFamily="34" charset="-120"/>
               </a:rPr>
+              <a:t>REMEDIATION</a:t>
+            </a:r>
+            <a:endParaRPr lang="en-US" sz="1400" dirty="0"/>
+          </a:p>
+        </p:txBody>
+      </p:sp>
+      <p:pic>
+        <p:nvPicPr>
+          <p:cNvPr id="3" name="Image 0" descr="/home/claude/f4/img/minesec_sheet.png">    </p:cNvPr>
+          <p:cNvPicPr>
+            <a:picLocks noChangeAspect="1"/>
+          </p:cNvPicPr>
+          <p:nvPr/>
+        </p:nvPicPr>
+        <p:blipFill>
+          <a:blip r:embed="rId1"/>
+          <a:stretch>
+            <a:fillRect/>
+          </a:stretch>
+        </p:blipFill>
+        <p:spPr>
+          <a:xfrm>
+            <a:off x="0" y="658368"/>
+            <a:ext cx="2468880" cy="5833872"/>
+          </a:xfrm>
+          <a:prstGeom prst="rect">
+            <a:avLst/>
+          </a:prstGeom>
+        </p:spPr>
+      </p:pic>
+      <p:sp>
+        <p:nvSpPr>
+          <p:cNvPr id="4" name="Text 1"/>
+          <p:cNvSpPr/>
+          <p:nvPr/>
+        </p:nvSpPr>
+        <p:spPr>
+          <a:xfrm>
+            <a:off x="2697480" y="1005840"/>
+            <a:ext cx="9174175" cy="731520"/>
+          </a:xfrm>
+          <a:prstGeom prst="rect">
+            <a:avLst/>
+          </a:prstGeom>
+          <a:noFill/>
+          <a:ln/>
+        </p:spPr>
+        <p:txBody>
+          <a:bodyPr wrap="square" lIns="0" tIns="0" rIns="0" bIns="0" rtlCol="0" anchor="ctr">
+            <a:normAutofit/>
+          </a:bodyPr>
+          <a:lstStyle/>
+          <a:p>
+            <a:pPr algn="ctr" indent="0" marL="0">
+              <a:buNone/>
+            </a:pPr>
+            <a:r>
+              <a:rPr lang="en-US" sz="3600" b="1" dirty="0">
+                <a:solidFill>
+                  <a:srgbClr val="990011"/>
+                </a:solidFill>
+                <a:latin typeface="Times New Roman" pitchFamily="34" charset="0"/>
+                <a:ea typeface="Times New Roman" pitchFamily="34" charset="-122"/>
+                <a:cs typeface="Times New Roman" pitchFamily="34" charset="-120"/>
+              </a:rPr>
+              <a:t>Remediation</a:t>
+            </a:r>
+            <a:endParaRPr lang="en-US" sz="3600" dirty="0"/>
+          </a:p>
+        </p:txBody>
+      </p:sp>
+      <p:sp>
+        <p:nvSpPr>
+          <p:cNvPr id="5" name="Text 2"/>
+          <p:cNvSpPr/>
+          <p:nvPr/>
+        </p:nvSpPr>
+        <p:spPr>
+          <a:xfrm>
+            <a:off x="2697480" y="1783080"/>
+            <a:ext cx="9174175" cy="4663440"/>
+          </a:xfrm>
+          <a:prstGeom prst="rect">
+            <a:avLst/>
+          </a:prstGeom>
+          <a:noFill/>
+          <a:ln/>
+        </p:spPr>
+        <p:txBody>
+          <a:bodyPr wrap="square" lIns="0" tIns="0" rIns="0" bIns="0" rtlCol="0" anchor="t"/>
+          <a:lstStyle/>
+          <a:p>
+            <a:pPr algn="l" indent="0" marL="0">
+              <a:spcAft>
+                <a:spcPts val="800"/>
+              </a:spcAft>
+              <a:buNone/>
+            </a:pPr>
+            <a:r>
+              <a:rPr lang="en-US" sz="4000" b="1" dirty="0">
+                <a:solidFill>
+                  <a:srgbClr val="111111"/>
+                </a:solidFill>
+                <a:latin typeface="Times New Roman" pitchFamily="34" charset="0"/>
+                <a:ea typeface="Times New Roman" pitchFamily="34" charset="-122"/>
+                <a:cs typeface="Times New Roman" pitchFamily="34" charset="-120"/>
+              </a:rPr>
+              <a:t>Fill in the blanks:</a:t>
+            </a:r>
+            <a:endParaRPr lang="en-US" sz="4000" dirty="0"/>
+          </a:p>
+          <a:p>
+            <a:pPr algn="l" marL="342900" indent="-342900">
+              <a:spcAft>
+                <a:spcPts val="800"/>
+              </a:spcAft>
+              <a:buSzPct val="100000"/>
+              <a:buFont typeface="+mj-lt"/>
+              <a:buAutoNum type="arabicPeriod" startAt="1"/>
+            </a:pPr>
+            <a:r>
+              <a:rPr lang="en-US" sz="4000" dirty="0">
+                <a:solidFill>
+                  <a:srgbClr val="111111"/>
+                </a:solidFill>
+                <a:latin typeface="Times New Roman" pitchFamily="34" charset="0"/>
+                <a:ea typeface="Times New Roman" pitchFamily="34" charset="-122"/>
+                <a:cs typeface="Times New Roman" pitchFamily="34" charset="-120"/>
+              </a:rPr>
+              <a:t>Water changing into vapour is ______.</a:t>
+            </a:r>
+            <a:endParaRPr lang="en-US" sz="4000" dirty="0"/>
+          </a:p>
+          <a:p>
+            <a:pPr algn="l" marL="342900" indent="-342900">
+              <a:spcAft>
+                <a:spcPts val="800"/>
+              </a:spcAft>
+              <a:buSzPct val="100000"/>
+              <a:buFont typeface="+mj-lt"/>
+              <a:buAutoNum type="arabicPeriod" startAt="1"/>
+            </a:pPr>
+            <a:r>
+              <a:rPr lang="en-US" sz="4000" dirty="0">
+                <a:solidFill>
+                  <a:srgbClr val="111111"/>
+                </a:solidFill>
+                <a:latin typeface="Times New Roman" pitchFamily="34" charset="0"/>
+                <a:ea typeface="Times New Roman" pitchFamily="34" charset="-122"/>
+                <a:cs typeface="Times New Roman" pitchFamily="34" charset="-120"/>
+              </a:rPr>
+              <a:t>Water flowing on the ground is ______.</a:t>
+            </a:r>
+            <a:endParaRPr lang="en-US" sz="4000" dirty="0"/>
+          </a:p>
+          <a:p>
+            <a:pPr algn="l" marL="342900" indent="-342900">
+              <a:spcAft>
+                <a:spcPts val="800"/>
+              </a:spcAft>
+              <a:buSzPct val="100000"/>
+              <a:buFont typeface="+mj-lt"/>
+              <a:buAutoNum type="arabicPeriod" startAt="1"/>
+            </a:pPr>
+            <a:r>
+              <a:rPr lang="en-US" sz="4000" dirty="0">
+                <a:solidFill>
+                  <a:srgbClr val="111111"/>
+                </a:solidFill>
+                <a:latin typeface="Times New Roman" pitchFamily="34" charset="0"/>
+                <a:ea typeface="Times New Roman" pitchFamily="34" charset="-122"/>
+                <a:cs typeface="Times New Roman" pitchFamily="34" charset="-120"/>
+              </a:rPr>
+              <a:t>Rain falling from clouds is ______.</a:t>
+            </a:r>
+            <a:endParaRPr lang="en-US" sz="4000" dirty="0"/>
+          </a:p>
+        </p:txBody>
+      </p:sp>
+      <p:sp>
+        <p:nvSpPr>
+          <p:cNvPr id="25" name="Slide Number Placeholder 0"/>
+          <p:cNvSpPr>
+            <a:spLocks noGrp="1"/>
+          </p:cNvSpPr>
+          <p:nvPr>
+            <p:ph type="sldNum" sz="quarter" idx="4294967295"/>
+          </p:nvPr>
+        </p:nvSpPr>
+        <p:spPr>
+          <a:xfrm>
+            <a:off x="27432" y="91440"/>
+            <a:ext cx="585216" cy="475488"/>
+          </a:xfrm>
+          <a:prstGeom prst="rect">
+            <a:avLst/>
+          </a:prstGeom>
+          <a:extLst>
+            <a:ext uri="{C572A759-6A51-4108-AA02-DFA0A04FC94B}">
+              <ma14:wrappingTextBoxFlag xmlns:ma14="http://schemas.microsoft.com/office/mac/drawingml/2011/main" val="0"/>
+            </a:ext>
+          </a:extLst>
+        </p:spPr>
+        <p:txBody>
+          <a:bodyPr/>
+          <a:lstStyle>
+            <a:lvl1pPr>
+              <a:defRPr sz="2000">
+                <a:solidFill>
+                  <a:srgbClr val="FFFFFF"/>
+                </a:solidFill>
+                <a:latin typeface="Calibri"/>
+                <a:ea typeface="Calibri"/>
+                <a:cs typeface="Calibri"/>
+              </a:defRPr>
+            </a:lvl1pPr>
+          </a:lstStyle>
+          <a:p>
+            <a:pPr algn="ctr"/>
+            <a:fld id="{F7021451-1387-4CA6-816F-3879F97B5CBC}" type="slidenum">
+              <a:rPr b="1" lang="en-US"/>
+              <a:t>43</a:t>
+            </a:fld>
+            <a:endParaRPr lang="en-US"/>
+          </a:p>
+        </p:txBody>
+      </p:sp>
+    </p:spTree>
+  </p:cSld>
+  <p:clrMapOvr>
+    <a:masterClrMapping/>
+  </p:clrMapOvr>
+</p:sld>
+</file>
+
+<file path=ppt/slides/slide44.xml><?xml version="1.0" encoding="utf-8"?>
+<p:sld xmlns:a="http://schemas.openxmlformats.org/drawingml/2006/main" xmlns:r="http://schemas.openxmlformats.org/officeDocument/2006/relationships" xmlns:p="http://schemas.openxmlformats.org/presentationml/2006/main">
+  <p:cSld name="Slide 44">
+    <p:spTree>
+      <p:nvGrpSpPr>
+        <p:cNvPr id="1" name=""/>
+        <p:cNvGrpSpPr/>
+        <p:nvPr/>
+      </p:nvGrpSpPr>
+      <p:grpSpPr>
+        <a:xfrm>
+          <a:off x="0" y="0"/>
+          <a:ext cx="0" cy="0"/>
+          <a:chOff x="0" y="0"/>
+          <a:chExt cx="0" cy="0"/>
+        </a:xfrm>
+      </p:grpSpPr>
+      <p:sp>
+        <p:nvSpPr>
+          <p:cNvPr id="2" name="Text 0"/>
+          <p:cNvSpPr/>
+          <p:nvPr/>
+        </p:nvSpPr>
+        <p:spPr>
+          <a:xfrm>
+            <a:off x="457200" y="713232"/>
+            <a:ext cx="11368735" cy="274320"/>
+          </a:xfrm>
+          <a:prstGeom prst="rect">
+            <a:avLst/>
+          </a:prstGeom>
+          <a:noFill/>
+          <a:ln/>
+        </p:spPr>
+        <p:txBody>
+          <a:bodyPr wrap="square" lIns="0" tIns="0" rIns="0" bIns="0" rtlCol="0" anchor="ctr"/>
+          <a:lstStyle/>
+          <a:p>
+            <a:pPr algn="r" indent="0" marL="0">
+              <a:buNone/>
+            </a:pPr>
+            <a:r>
+              <a:rPr lang="en-US" sz="1400" b="1" dirty="0">
+                <a:solidFill>
+                  <a:srgbClr val="1C3F6E"/>
+                </a:solidFill>
+                <a:latin typeface="Calibri" pitchFamily="34" charset="0"/>
+                <a:ea typeface="Calibri" pitchFamily="34" charset="-122"/>
+                <a:cs typeface="Calibri" pitchFamily="34" charset="-120"/>
+              </a:rPr>
+              <a:t>HOMEWORK</a:t>
+            </a:r>
+            <a:endParaRPr lang="en-US" sz="1400" dirty="0"/>
+          </a:p>
+        </p:txBody>
+      </p:sp>
+      <p:pic>
+        <p:nvPicPr>
+          <p:cNvPr id="3" name="Image 0" descr="/home/claude/f4/img/minesec_sheet.png">    </p:cNvPr>
+          <p:cNvPicPr>
+            <a:picLocks noChangeAspect="1"/>
+          </p:cNvPicPr>
+          <p:nvPr/>
+        </p:nvPicPr>
+        <p:blipFill>
+          <a:blip r:embed="rId1"/>
+          <a:stretch>
+            <a:fillRect/>
+          </a:stretch>
+        </p:blipFill>
+        <p:spPr>
+          <a:xfrm>
+            <a:off x="0" y="658368"/>
+            <a:ext cx="5120640" cy="5833872"/>
+          </a:xfrm>
+          <a:prstGeom prst="rect">
+            <a:avLst/>
+          </a:prstGeom>
+        </p:spPr>
+      </p:pic>
+      <p:sp>
+        <p:nvSpPr>
+          <p:cNvPr id="4" name="Text 1"/>
+          <p:cNvSpPr/>
+          <p:nvPr/>
+        </p:nvSpPr>
+        <p:spPr>
+          <a:xfrm>
+            <a:off x="5349240" y="1005840"/>
+            <a:ext cx="6522415" cy="731520"/>
+          </a:xfrm>
+          <a:prstGeom prst="rect">
+            <a:avLst/>
+          </a:prstGeom>
+          <a:noFill/>
+          <a:ln/>
+        </p:spPr>
+        <p:txBody>
+          <a:bodyPr wrap="square" lIns="0" tIns="0" rIns="0" bIns="0" rtlCol="0" anchor="ctr">
+            <a:normAutofit/>
+          </a:bodyPr>
+          <a:lstStyle/>
+          <a:p>
+            <a:pPr algn="ctr" indent="0" marL="0">
+              <a:buNone/>
+            </a:pPr>
+            <a:r>
+              <a:rPr lang="en-US" sz="3600" b="1" dirty="0">
+                <a:solidFill>
+                  <a:srgbClr val="990011"/>
+                </a:solidFill>
+                <a:latin typeface="Times New Roman" pitchFamily="34" charset="0"/>
+                <a:ea typeface="Times New Roman" pitchFamily="34" charset="-122"/>
+                <a:cs typeface="Times New Roman" pitchFamily="34" charset="-120"/>
+              </a:rPr>
+              <a:t>Homework</a:t>
+            </a:r>
+            <a:endParaRPr lang="en-US" sz="3600" dirty="0"/>
+          </a:p>
+        </p:txBody>
+      </p:sp>
+      <p:sp>
+        <p:nvSpPr>
+          <p:cNvPr id="5" name="Text 2"/>
+          <p:cNvSpPr/>
+          <p:nvPr/>
+        </p:nvSpPr>
+        <p:spPr>
+          <a:xfrm>
+            <a:off x="5349240" y="1783080"/>
+            <a:ext cx="6522415" cy="4663440"/>
+          </a:xfrm>
+          <a:prstGeom prst="rect">
+            <a:avLst/>
+          </a:prstGeom>
+          <a:noFill/>
+          <a:ln/>
+        </p:spPr>
+        <p:txBody>
+          <a:bodyPr wrap="square" lIns="0" tIns="0" rIns="0" bIns="0" rtlCol="0" anchor="t"/>
+          <a:lstStyle/>
+          <a:p>
+            <a:pPr algn="l" indent="0" marL="0">
+              <a:spcAft>
+                <a:spcPts val="800"/>
+              </a:spcAft>
+              <a:buNone/>
+            </a:pPr>
+            <a:r>
+              <a:rPr lang="en-US" sz="4000" dirty="0">
+                <a:solidFill>
+                  <a:srgbClr val="111111"/>
+                </a:solidFill>
+                <a:latin typeface="Times New Roman" pitchFamily="34" charset="0"/>
+                <a:ea typeface="Times New Roman" pitchFamily="34" charset="-122"/>
+                <a:cs typeface="Times New Roman" pitchFamily="34" charset="-120"/>
+              </a:rPr>
+              <a:t>Ask your grandparents or an elder whether the dry season is hotter or longer today than when they were young. Write down what they say.</a:t>
+            </a:r>
+            <a:endParaRPr lang="en-US" sz="4000" dirty="0"/>
+          </a:p>
+        </p:txBody>
+      </p:sp>
+      <p:sp>
+        <p:nvSpPr>
+          <p:cNvPr id="25" name="Slide Number Placeholder 0"/>
+          <p:cNvSpPr>
+            <a:spLocks noGrp="1"/>
+          </p:cNvSpPr>
+          <p:nvPr>
+            <p:ph type="sldNum" sz="quarter" idx="4294967295"/>
+          </p:nvPr>
+        </p:nvSpPr>
+        <p:spPr>
+          <a:xfrm>
+            <a:off x="27432" y="91440"/>
+            <a:ext cx="585216" cy="475488"/>
+          </a:xfrm>
+          <a:prstGeom prst="rect">
+            <a:avLst/>
+          </a:prstGeom>
+          <a:extLst>
+            <a:ext uri="{C572A759-6A51-4108-AA02-DFA0A04FC94B}">
+              <ma14:wrappingTextBoxFlag xmlns:ma14="http://schemas.microsoft.com/office/mac/drawingml/2011/main" val="0"/>
+            </a:ext>
+          </a:extLst>
+        </p:spPr>
+        <p:txBody>
+          <a:bodyPr/>
+          <a:lstStyle>
+            <a:lvl1pPr>
+              <a:defRPr sz="2000">
+                <a:solidFill>
+                  <a:srgbClr val="FFFFFF"/>
+                </a:solidFill>
+                <a:latin typeface="Calibri"/>
+                <a:ea typeface="Calibri"/>
+                <a:cs typeface="Calibri"/>
+              </a:defRPr>
+            </a:lvl1pPr>
+          </a:lstStyle>
+          <a:p>
+            <a:pPr algn="ctr"/>
+            <a:fld id="{F7021451-1387-4CA6-816F-3879F97B5CBC}" type="slidenum">
+              <a:rPr b="1" lang="en-US"/>
+              <a:t>44</a:t>
+            </a:fld>
+            <a:endParaRPr lang="en-US"/>
+          </a:p>
+        </p:txBody>
+      </p:sp>
+    </p:spTree>
+  </p:cSld>
+  <p:clrMapOvr>
+    <a:masterClrMapping/>
+  </p:clrMapOvr>
+</p:sld>
+</file>
+
+<file path=ppt/slides/slide45.xml><?xml version="1.0" encoding="utf-8"?>
+<p:sld xmlns:a="http://schemas.openxmlformats.org/drawingml/2006/main" xmlns:r="http://schemas.openxmlformats.org/officeDocument/2006/relationships" xmlns:p="http://schemas.openxmlformats.org/presentationml/2006/main">
+  <p:cSld name="Slide 45">
+    <p:spTree>
+      <p:nvGrpSpPr>
+        <p:cNvPr id="1" name=""/>
+        <p:cNvGrpSpPr/>
+        <p:nvPr/>
+      </p:nvGrpSpPr>
+      <p:grpSpPr>
+        <a:xfrm>
+          <a:off x="0" y="0"/>
+          <a:ext cx="0" cy="0"/>
+          <a:chOff x="0" y="0"/>
+          <a:chExt cx="0" cy="0"/>
+        </a:xfrm>
+      </p:grpSpPr>
+      <p:sp>
+        <p:nvSpPr>
+          <p:cNvPr id="2" name="Text 0"/>
+          <p:cNvSpPr/>
+          <p:nvPr/>
+        </p:nvSpPr>
+        <p:spPr>
+          <a:xfrm>
+            <a:off x="457200" y="713232"/>
+            <a:ext cx="11368735" cy="274320"/>
+          </a:xfrm>
+          <a:prstGeom prst="rect">
+            <a:avLst/>
+          </a:prstGeom>
+          <a:noFill/>
+          <a:ln/>
+        </p:spPr>
+        <p:txBody>
+          <a:bodyPr wrap="square" lIns="0" tIns="0" rIns="0" bIns="0" rtlCol="0" anchor="ctr"/>
+          <a:lstStyle/>
+          <a:p>
+            <a:pPr algn="r" indent="0" marL="0">
+              <a:buNone/>
+            </a:pPr>
+            <a:r>
+              <a:rPr lang="en-US" sz="1400" b="1" dirty="0">
+                <a:solidFill>
+                  <a:srgbClr val="1C3F6E"/>
+                </a:solidFill>
+                <a:latin typeface="Calibri" pitchFamily="34" charset="0"/>
+                <a:ea typeface="Calibri" pitchFamily="34" charset="-122"/>
+                <a:cs typeface="Calibri" pitchFamily="34" charset="-120"/>
+              </a:rPr>
+              <a:t>NEXT LESSON</a:t>
+            </a:r>
+            <a:endParaRPr lang="en-US" sz="1400" dirty="0"/>
+          </a:p>
+        </p:txBody>
+      </p:sp>
+      <p:pic>
+        <p:nvPicPr>
+          <p:cNvPr id="3" name="Image 0" descr="/home/claude/f4/img/minesec_sheet.png">    </p:cNvPr>
+          <p:cNvPicPr>
+            <a:picLocks noChangeAspect="1"/>
+          </p:cNvPicPr>
+          <p:nvPr/>
+        </p:nvPicPr>
+        <p:blipFill>
+          <a:blip r:embed="rId1"/>
+          <a:stretch>
+            <a:fillRect/>
+          </a:stretch>
+        </p:blipFill>
+        <p:spPr>
+          <a:xfrm>
+            <a:off x="0" y="658368"/>
+            <a:ext cx="5120640" cy="5833872"/>
+          </a:xfrm>
+          <a:prstGeom prst="rect">
+            <a:avLst/>
+          </a:prstGeom>
+        </p:spPr>
+      </p:pic>
+      <p:sp>
+        <p:nvSpPr>
+          <p:cNvPr id="4" name="Text 1"/>
+          <p:cNvSpPr/>
+          <p:nvPr/>
+        </p:nvSpPr>
+        <p:spPr>
+          <a:xfrm>
+            <a:off x="5349240" y="1005840"/>
+            <a:ext cx="6522415" cy="731520"/>
+          </a:xfrm>
+          <a:prstGeom prst="rect">
+            <a:avLst/>
+          </a:prstGeom>
+          <a:noFill/>
+          <a:ln/>
+        </p:spPr>
+        <p:txBody>
+          <a:bodyPr wrap="square" lIns="0" tIns="0" rIns="0" bIns="0" rtlCol="0" anchor="ctr">
+            <a:normAutofit/>
+          </a:bodyPr>
+          <a:lstStyle/>
+          <a:p>
+            <a:pPr algn="ctr" indent="0" marL="0">
+              <a:buNone/>
+            </a:pPr>
+            <a:r>
+              <a:rPr lang="en-US" sz="3600" b="1" dirty="0">
+                <a:solidFill>
+                  <a:srgbClr val="990011"/>
+                </a:solidFill>
+                <a:latin typeface="Times New Roman" pitchFamily="34" charset="0"/>
+                <a:ea typeface="Times New Roman" pitchFamily="34" charset="-122"/>
+                <a:cs typeface="Times New Roman" pitchFamily="34" charset="-120"/>
+              </a:rPr>
+              <a:t>Next Lesson</a:t>
+            </a:r>
+            <a:endParaRPr lang="en-US" sz="3600" dirty="0"/>
+          </a:p>
+        </p:txBody>
+      </p:sp>
+      <p:sp>
+        <p:nvSpPr>
+          <p:cNvPr id="5" name="Text 2"/>
+          <p:cNvSpPr/>
+          <p:nvPr/>
+        </p:nvSpPr>
+        <p:spPr>
+          <a:xfrm>
+            <a:off x="5349240" y="1783080"/>
+            <a:ext cx="6522415" cy="4663440"/>
+          </a:xfrm>
+          <a:prstGeom prst="rect">
+            <a:avLst/>
+          </a:prstGeom>
+          <a:noFill/>
+          <a:ln/>
+        </p:spPr>
+        <p:txBody>
+          <a:bodyPr wrap="square" lIns="0" tIns="0" rIns="0" bIns="0" rtlCol="0" anchor="ctr"/>
+          <a:lstStyle/>
+          <a:p>
+            <a:pPr algn="ctr" indent="0" marL="0">
+              <a:spcAft>
+                <a:spcPts val="800"/>
+              </a:spcAft>
+              <a:buNone/>
+            </a:pPr>
+            <a:r>
+              <a:rPr lang="en-US" sz="4000" b="1" dirty="0">
+                <a:solidFill>
+                  <a:srgbClr val="111111"/>
+                </a:solidFill>
+                <a:latin typeface="Times New Roman" pitchFamily="34" charset="0"/>
+                <a:ea typeface="Times New Roman" pitchFamily="34" charset="-122"/>
+                <a:cs typeface="Times New Roman" pitchFamily="34" charset="-120"/>
+              </a:rPr>
+              <a:t>Our next lesson will be on:</a:t>
+            </a:r>
+            <a:endParaRPr lang="en-US" sz="4000" dirty="0"/>
+          </a:p>
+          <a:p>
+            <a:pPr algn="ctr" indent="0" marL="0">
+              <a:spcAft>
+                <a:spcPts val="800"/>
+              </a:spcAft>
+              <a:buNone/>
+            </a:pPr>
+            <a:r>
+              <a:rPr lang="en-US" sz="4000" b="1" dirty="0">
+                <a:solidFill>
+                  <a:srgbClr val="990011"/>
+                </a:solidFill>
+                <a:latin typeface="Times New Roman" pitchFamily="34" charset="0"/>
+                <a:ea typeface="Times New Roman" pitchFamily="34" charset="-122"/>
+                <a:cs typeface="Times New Roman" pitchFamily="34" charset="-120"/>
+              </a:rPr>
+              <a:t>Lesson 40: Global Warming</a:t>
+            </a:r>
+            <a:endParaRPr lang="en-US" sz="4000" dirty="0"/>
+          </a:p>
+        </p:txBody>
+      </p:sp>
+      <p:sp>
+        <p:nvSpPr>
+          <p:cNvPr id="25" name="Slide Number Placeholder 0"/>
+          <p:cNvSpPr>
+            <a:spLocks noGrp="1"/>
+          </p:cNvSpPr>
+          <p:nvPr>
+            <p:ph type="sldNum" sz="quarter" idx="4294967295"/>
+          </p:nvPr>
+        </p:nvSpPr>
+        <p:spPr>
+          <a:xfrm>
+            <a:off x="27432" y="91440"/>
+            <a:ext cx="585216" cy="475488"/>
+          </a:xfrm>
+          <a:prstGeom prst="rect">
+            <a:avLst/>
+          </a:prstGeom>
+          <a:extLst>
+            <a:ext uri="{C572A759-6A51-4108-AA02-DFA0A04FC94B}">
+              <ma14:wrappingTextBoxFlag xmlns:ma14="http://schemas.microsoft.com/office/mac/drawingml/2011/main" val="0"/>
+            </a:ext>
+          </a:extLst>
+        </p:spPr>
+        <p:txBody>
+          <a:bodyPr/>
+          <a:lstStyle>
+            <a:lvl1pPr>
+              <a:defRPr sz="2000">
+                <a:solidFill>
+                  <a:srgbClr val="FFFFFF"/>
+                </a:solidFill>
+                <a:latin typeface="Calibri"/>
+                <a:ea typeface="Calibri"/>
+                <a:cs typeface="Calibri"/>
+              </a:defRPr>
+            </a:lvl1pPr>
+          </a:lstStyle>
+          <a:p>
+            <a:pPr algn="ctr"/>
+            <a:fld id="{F7021451-1387-4CA6-816F-3879F97B5CBC}" type="slidenum">
+              <a:rPr b="1" lang="en-US"/>
+              <a:t>45</a:t>
+            </a:fld>
+            <a:endParaRPr lang="en-US"/>
+          </a:p>
+        </p:txBody>
+      </p:sp>
+    </p:spTree>
+  </p:cSld>
+  <p:clrMapOvr>
+    <a:masterClrMapping/>
+  </p:clrMapOvr>
+</p:sld>
+</file>
+
+<file path=ppt/slides/slide46.xml><?xml version="1.0" encoding="utf-8"?>
+<p:sld xmlns:a="http://schemas.openxmlformats.org/drawingml/2006/main" xmlns:r="http://schemas.openxmlformats.org/officeDocument/2006/relationships" xmlns:p="http://schemas.openxmlformats.org/presentationml/2006/main">
+  <p:cSld name="Slide 46">
+    <p:spTree>
+      <p:nvGrpSpPr>
+        <p:cNvPr id="1" name=""/>
+        <p:cNvGrpSpPr/>
+        <p:nvPr/>
+      </p:nvGrpSpPr>
+      <p:grpSpPr>
+        <a:xfrm>
+          <a:off x="0" y="0"/>
+          <a:ext cx="0" cy="0"/>
+          <a:chOff x="0" y="0"/>
+          <a:chExt cx="0" cy="0"/>
+        </a:xfrm>
+      </p:grpSpPr>
+      <p:sp>
+        <p:nvSpPr>
+          <p:cNvPr id="2" name="Text 0"/>
+          <p:cNvSpPr/>
+          <p:nvPr/>
+        </p:nvSpPr>
+        <p:spPr>
+          <a:xfrm>
+            <a:off x="457200" y="713232"/>
+            <a:ext cx="11368735" cy="274320"/>
+          </a:xfrm>
+          <a:prstGeom prst="rect">
+            <a:avLst/>
+          </a:prstGeom>
+          <a:noFill/>
+          <a:ln/>
+        </p:spPr>
+        <p:txBody>
+          <a:bodyPr wrap="square" lIns="0" tIns="0" rIns="0" bIns="0" rtlCol="0" anchor="ctr"/>
+          <a:lstStyle/>
+          <a:p>
+            <a:pPr algn="r" indent="0" marL="0">
+              <a:buNone/>
+            </a:pPr>
+            <a:r>
+              <a:rPr lang="en-US" sz="1400" b="1" dirty="0">
+                <a:solidFill>
+                  <a:srgbClr val="1C3F6E"/>
+                </a:solidFill>
+                <a:latin typeface="Calibri" pitchFamily="34" charset="0"/>
+                <a:ea typeface="Calibri" pitchFamily="34" charset="-122"/>
+                <a:cs typeface="Calibri" pitchFamily="34" charset="-120"/>
+              </a:rPr>
               <a:t>BILINGUAL GAME</a:t>
             </a:r>
             <a:endParaRPr lang="en-US" sz="1400" dirty="0"/>
@@ -15544,7 +16601,7 @@
       </p:sp>
       <p:graphicFrame>
         <p:nvGraphicFramePr>
-          <p:cNvPr id="44" name="Table 0"/>
+          <p:cNvPr id="47" name="Table 0"/>
           <p:cNvGraphicFramePr>
             <a:graphicFrameLocks noGrp="1"/>
           </p:cNvGraphicFramePr>
@@ -16856,7 +17913,7 @@
             <a:pPr algn="ctr"/>
             <a:fld id="{F7021451-1387-4CA6-816F-3879F97B5CBC}" type="slidenum">
               <a:rPr b="1" lang="en-US"/>
-              <a:t>43</a:t>
+              <a:t>46</a:t>
             </a:fld>
             <a:endParaRPr lang="en-US"/>
           </a:p>
@@ -16870,9 +17927,9 @@
 </p:sld>
 </file>
 
-<file path=ppt/slides/slide44.xml><?xml version="1.0" encoding="utf-8"?>
+<file path=ppt/slides/slide47.xml><?xml version="1.0" encoding="utf-8"?>
 <p:sld xmlns:a="http://schemas.openxmlformats.org/drawingml/2006/main" xmlns:r="http://schemas.openxmlformats.org/officeDocument/2006/relationships" xmlns:p="http://schemas.openxmlformats.org/presentationml/2006/main">
-  <p:cSld name="Slide 44">
+  <p:cSld name="Slide 47">
     <p:spTree>
       <p:nvGrpSpPr>
         <p:cNvPr id="1" name=""/>
@@ -16967,7 +18024,7 @@
       </p:sp>
       <p:graphicFrame>
         <p:nvGraphicFramePr>
-          <p:cNvPr id="45" name="Table 0"/>
+          <p:cNvPr id="48" name="Table 0"/>
           <p:cNvGraphicFramePr>
             <a:graphicFrameLocks noGrp="1"/>
           </p:cNvGraphicFramePr>
@@ -17589,7 +18646,7 @@
             <a:pPr algn="ctr"/>
             <a:fld id="{F7021451-1387-4CA6-816F-3879F97B5CBC}" type="slidenum">
               <a:rPr b="1" lang="en-US"/>
-              <a:t>44</a:t>
+              <a:t>47</a:t>
             </a:fld>
             <a:endParaRPr lang="en-US"/>
           </a:p>
@@ -17603,9 +18660,9 @@
 </p:sld>
 </file>
 
-<file path=ppt/slides/slide45.xml><?xml version="1.0" encoding="utf-8"?>
+<file path=ppt/slides/slide48.xml><?xml version="1.0" encoding="utf-8"?>
 <p:sld xmlns:a="http://schemas.openxmlformats.org/drawingml/2006/main" xmlns:r="http://schemas.openxmlformats.org/officeDocument/2006/relationships" xmlns:p="http://schemas.openxmlformats.org/presentationml/2006/main">
-  <p:cSld name="Slide 45">
+  <p:cSld name="Slide 48">
     <p:spTree>
       <p:nvGrpSpPr>
         <p:cNvPr id="1" name=""/>
@@ -17700,7 +18757,7 @@
       </p:sp>
       <p:graphicFrame>
         <p:nvGraphicFramePr>
-          <p:cNvPr id="46" name="Table 0"/>
+          <p:cNvPr id="49" name="Table 0"/>
           <p:cNvGraphicFramePr>
             <a:graphicFrameLocks noGrp="1"/>
           </p:cNvGraphicFramePr>
@@ -17810,7 +18867,7 @@
                           <a:ea typeface="Calibri" pitchFamily="34" charset="-122"/>
                           <a:cs typeface="Calibri" pitchFamily="34" charset="-120"/>
                         </a:rPr>
-                        <a:t>Meaning; Components; The Hydrological Cycle as an Open System.</a:t>
+                        <a:t>DEFINITIONS; Meaning: Components of the Hydrological Cycle; The Flow Diagram as an Open System.</a:t>
                       </a:r>
                       <a:endParaRPr lang="en-US" sz="1600" dirty="0">
                         <a:latin typeface="Calibri" charset="0"/>
@@ -18460,7 +19517,7 @@
             <a:pPr algn="ctr"/>
             <a:fld id="{F7021451-1387-4CA6-816F-3879F97B5CBC}" type="slidenum">
               <a:rPr b="1" lang="en-US"/>
-              <a:t>45</a:t>
+              <a:t>48</a:t>
             </a:fld>
             <a:endParaRPr lang="en-US"/>
           </a:p>
@@ -18474,9 +19531,9 @@
 </p:sld>
 </file>
 
-<file path=ppt/slides/slide46.xml><?xml version="1.0" encoding="utf-8"?>
+<file path=ppt/slides/slide49.xml><?xml version="1.0" encoding="utf-8"?>
 <p:sld xmlns:a="http://schemas.openxmlformats.org/drawingml/2006/main" xmlns:r="http://schemas.openxmlformats.org/officeDocument/2006/relationships" xmlns:p="http://schemas.openxmlformats.org/presentationml/2006/main">
-  <p:cSld name="Slide 46">
+  <p:cSld name="Slide 49">
     <p:spTree>
       <p:nvGrpSpPr>
         <p:cNvPr id="1" name=""/>
@@ -18674,7 +19731,7 @@
                 <a:ea typeface="Calibri" pitchFamily="34" charset="-122"/>
                 <a:cs typeface="Calibri" pitchFamily="34" charset="-120"/>
               </a:rPr>
-              <a:t>Without the projector (Activity 1): draw the sea, a cloud, rain and a river on the board.</a:t>
+              <a:t>Without the projector (Activity 1): boil water and hold a cold lid over it.</a:t>
             </a:r>
             <a:endParaRPr lang="en-US" sz="2000" dirty="0"/>
           </a:p>
@@ -18695,7 +19752,7 @@
                 <a:ea typeface="Calibri" pitchFamily="34" charset="-122"/>
                 <a:cs typeface="Calibri" pitchFamily="34" charset="-120"/>
               </a:rPr>
-              <a:t>Without the projector (Activity 2): describe the Benue in September.</a:t>
+              <a:t>Without the projector (Activity 2): describe water after a storm.</a:t>
             </a:r>
             <a:endParaRPr lang="en-US" sz="2000" dirty="0"/>
           </a:p>
@@ -18716,7 +19773,7 @@
                 <a:ea typeface="Calibri" pitchFamily="34" charset="-122"/>
                 <a:cs typeface="Calibri" pitchFamily="34" charset="-120"/>
               </a:rPr>
-              <a:t>Without the projector (Activity 3): draw three boxes with arrows.</a:t>
+              <a:t>Without the projector (Activity 3): draw three boxes on the board.</a:t>
             </a:r>
             <a:endParaRPr lang="en-US" sz="2000" dirty="0"/>
           </a:p>
@@ -18764,290 +19821,7 @@
             <a:pPr algn="ctr"/>
             <a:fld id="{F7021451-1387-4CA6-816F-3879F97B5CBC}" type="slidenum">
               <a:rPr b="1" lang="en-US"/>
-              <a:t>46</a:t>
-            </a:fld>
-            <a:endParaRPr lang="en-US"/>
-          </a:p>
-        </p:txBody>
-      </p:sp>
-    </p:spTree>
-  </p:cSld>
-  <p:clrMapOvr>
-    <a:masterClrMapping/>
-  </p:clrMapOvr>
-</p:sld>
-</file>
-
-<file path=ppt/slides/slide47.xml><?xml version="1.0" encoding="utf-8"?>
-<p:sld xmlns:a="http://schemas.openxmlformats.org/drawingml/2006/main" xmlns:r="http://schemas.openxmlformats.org/officeDocument/2006/relationships" xmlns:p="http://schemas.openxmlformats.org/presentationml/2006/main">
-  <p:cSld name="Slide 47">
-    <p:spTree>
-      <p:nvGrpSpPr>
-        <p:cNvPr id="1" name=""/>
-        <p:cNvGrpSpPr/>
-        <p:nvPr/>
-      </p:nvGrpSpPr>
-      <p:grpSpPr>
-        <a:xfrm>
-          <a:off x="0" y="0"/>
-          <a:ext cx="0" cy="0"/>
-          <a:chOff x="0" y="0"/>
-          <a:chExt cx="0" cy="0"/>
-        </a:xfrm>
-      </p:grpSpPr>
-      <p:sp>
-        <p:nvSpPr>
-          <p:cNvPr id="2" name="Text 0"/>
-          <p:cNvSpPr/>
-          <p:nvPr/>
-        </p:nvSpPr>
-        <p:spPr>
-          <a:xfrm>
-            <a:off x="457200" y="713232"/>
-            <a:ext cx="11368735" cy="274320"/>
-          </a:xfrm>
-          <a:prstGeom prst="rect">
-            <a:avLst/>
-          </a:prstGeom>
-          <a:noFill/>
-          <a:ln/>
-        </p:spPr>
-        <p:txBody>
-          <a:bodyPr wrap="square" lIns="0" tIns="0" rIns="0" bIns="0" rtlCol="0" anchor="ctr"/>
-          <a:lstStyle/>
-          <a:p>
-            <a:pPr algn="r" indent="0" marL="0">
-              <a:buNone/>
-            </a:pPr>
-            <a:r>
-              <a:rPr lang="en-US" sz="1400" b="1" dirty="0">
-                <a:solidFill>
-                  <a:srgbClr val="1C3F6E"/>
-                </a:solidFill>
-                <a:latin typeface="Calibri" pitchFamily="34" charset="0"/>
-                <a:ea typeface="Calibri" pitchFamily="34" charset="-122"/>
-                <a:cs typeface="Calibri" pitchFamily="34" charset="-120"/>
-              </a:rPr>
-              <a:t>REFERENCES</a:t>
-            </a:r>
-            <a:endParaRPr lang="en-US" sz="1400" dirty="0"/>
-          </a:p>
-        </p:txBody>
-      </p:sp>
-      <p:pic>
-        <p:nvPicPr>
-          <p:cNvPr id="3" name="Image 0" descr="/home/claude/f4/img/minesec_sheet.png">    </p:cNvPr>
-          <p:cNvPicPr>
-            <a:picLocks noChangeAspect="1"/>
-          </p:cNvPicPr>
-          <p:nvPr/>
-        </p:nvPicPr>
-        <p:blipFill>
-          <a:blip r:embed="rId1"/>
-          <a:stretch>
-            <a:fillRect/>
-          </a:stretch>
-        </p:blipFill>
-        <p:spPr>
-          <a:xfrm>
-            <a:off x="0" y="658368"/>
-            <a:ext cx="5120640" cy="5833872"/>
-          </a:xfrm>
-          <a:prstGeom prst="rect">
-            <a:avLst/>
-          </a:prstGeom>
-        </p:spPr>
-      </p:pic>
-      <p:sp>
-        <p:nvSpPr>
-          <p:cNvPr id="4" name="Text 1"/>
-          <p:cNvSpPr/>
-          <p:nvPr/>
-        </p:nvSpPr>
-        <p:spPr>
-          <a:xfrm>
-            <a:off x="5349240" y="1005840"/>
-            <a:ext cx="6522415" cy="731520"/>
-          </a:xfrm>
-          <a:prstGeom prst="rect">
-            <a:avLst/>
-          </a:prstGeom>
-          <a:noFill/>
-          <a:ln/>
-        </p:spPr>
-        <p:txBody>
-          <a:bodyPr wrap="square" lIns="0" tIns="0" rIns="0" bIns="0" rtlCol="0" anchor="ctr">
-            <a:normAutofit/>
-          </a:bodyPr>
-          <a:lstStyle/>
-          <a:p>
-            <a:pPr algn="ctr" indent="0" marL="0">
-              <a:buNone/>
-            </a:pPr>
-            <a:r>
-              <a:rPr lang="en-US" sz="3600" b="1" dirty="0">
-                <a:solidFill>
-                  <a:srgbClr val="990011"/>
-                </a:solidFill>
-                <a:latin typeface="Times New Roman" pitchFamily="34" charset="0"/>
-                <a:ea typeface="Times New Roman" pitchFamily="34" charset="-122"/>
-                <a:cs typeface="Times New Roman" pitchFamily="34" charset="-120"/>
-              </a:rPr>
-              <a:t>References</a:t>
-            </a:r>
-            <a:endParaRPr lang="en-US" sz="3600" dirty="0"/>
-          </a:p>
-        </p:txBody>
-      </p:sp>
-      <p:sp>
-        <p:nvSpPr>
-          <p:cNvPr id="5" name="Text 2"/>
-          <p:cNvSpPr/>
-          <p:nvPr/>
-        </p:nvSpPr>
-        <p:spPr>
-          <a:xfrm>
-            <a:off x="5349240" y="1783080"/>
-            <a:ext cx="6522415" cy="4663440"/>
-          </a:xfrm>
-          <a:prstGeom prst="rect">
-            <a:avLst/>
-          </a:prstGeom>
-          <a:noFill/>
-          <a:ln/>
-        </p:spPr>
-        <p:txBody>
-          <a:bodyPr wrap="square" lIns="0" tIns="0" rIns="0" bIns="0" rtlCol="0" anchor="t"/>
-          <a:lstStyle/>
-          <a:p>
-            <a:pPr algn="l" marL="342900" indent="-342900">
-              <a:spcAft>
-                <a:spcPts val="800"/>
-              </a:spcAft>
-              <a:buSzPct val="100000"/>
-              <a:buChar char="•"/>
-            </a:pPr>
-            <a:r>
-              <a:rPr lang="en-US" sz="1800" dirty="0">
-                <a:solidFill>
-                  <a:srgbClr val="111111"/>
-                </a:solidFill>
-                <a:latin typeface="Calibri" pitchFamily="34" charset="0"/>
-                <a:ea typeface="Calibri" pitchFamily="34" charset="-122"/>
-                <a:cs typeface="Calibri" pitchFamily="34" charset="-120"/>
-              </a:rPr>
-              <a:t>National Geography Syllabus (MINESEC), Form 4 — Module 3: Weather and Climate.</a:t>
-            </a:r>
-            <a:endParaRPr lang="en-US" sz="1800" dirty="0"/>
-          </a:p>
-          <a:p>
-            <a:pPr algn="l" marL="342900" indent="-342900">
-              <a:spcAft>
-                <a:spcPts val="800"/>
-              </a:spcAft>
-              <a:buSzPct val="100000"/>
-              <a:buChar char="•"/>
-            </a:pPr>
-            <a:r>
-              <a:rPr lang="en-US" sz="1800" dirty="0">
-                <a:solidFill>
-                  <a:srgbClr val="111111"/>
-                </a:solidFill>
-                <a:latin typeface="Calibri" pitchFamily="34" charset="0"/>
-                <a:ea typeface="Calibri" pitchFamily="34" charset="-122"/>
-                <a:cs typeface="Calibri" pitchFamily="34" charset="-120"/>
-              </a:rPr>
-              <a:t>Teacher's lesson notes (f4.docx), checked and corrected where necessary.</a:t>
-            </a:r>
-            <a:endParaRPr lang="en-US" sz="1800" dirty="0"/>
-          </a:p>
-          <a:p>
-            <a:pPr algn="l" marL="342900" indent="-342900">
-              <a:spcAft>
-                <a:spcPts val="800"/>
-              </a:spcAft>
-              <a:buSzPct val="100000"/>
-              <a:buChar char="•"/>
-            </a:pPr>
-            <a:r>
-              <a:rPr lang="en-US" sz="1800" dirty="0">
-                <a:solidFill>
-                  <a:srgbClr val="111111"/>
-                </a:solidFill>
-                <a:latin typeface="Calibri" pitchFamily="34" charset="0"/>
-                <a:ea typeface="Calibri" pitchFamily="34" charset="-122"/>
-                <a:cs typeface="Calibri" pitchFamily="34" charset="-120"/>
-              </a:rPr>
-              <a:t>Photo, Activity 2: “Parana River Floodplain, Northern Argentina (NASA, International Space” by NASA's Marshall Space Flight Center, CC BY-NC 2.0, via nasa (https://www.flickr.com/photos/28634332@N05/5684050889)</a:t>
-            </a:r>
-            <a:endParaRPr lang="en-US" sz="1800" dirty="0"/>
-          </a:p>
-          <a:p>
-            <a:pPr algn="l" marL="342900" indent="-342900">
-              <a:spcAft>
-                <a:spcPts val="800"/>
-              </a:spcAft>
-              <a:buSzPct val="100000"/>
-              <a:buChar char="•"/>
-            </a:pPr>
-            <a:r>
-              <a:rPr lang="en-US" sz="1800" dirty="0">
-                <a:solidFill>
-                  <a:srgbClr val="111111"/>
-                </a:solidFill>
-                <a:latin typeface="Calibri" pitchFamily="34" charset="0"/>
-                <a:ea typeface="Calibri" pitchFamily="34" charset="-122"/>
-                <a:cs typeface="Calibri" pitchFamily="34" charset="-120"/>
-              </a:rPr>
-              <a:t>Diagrams and animations: drawn for this lesson (Geography Department).</a:t>
-            </a:r>
-            <a:endParaRPr lang="en-US" sz="1800" dirty="0"/>
-          </a:p>
-        </p:txBody>
-      </p:sp>
-      <p:sp>
-        <p:nvSpPr>
-          <p:cNvPr id="25" name="Slide Number Placeholder 0"/>
-          <p:cNvSpPr>
-            <a:spLocks noGrp="1"/>
-          </p:cNvSpPr>
-          <p:nvPr>
-            <p:ph type="sldNum" sz="quarter" idx="4294967295"/>
-          </p:nvPr>
-        </p:nvSpPr>
-        <p:spPr>
-          <a:xfrm>
-            <a:off x="27432" y="91440"/>
-            <a:ext cx="585216" cy="475488"/>
-          </a:xfrm>
-          <a:prstGeom prst="rect">
-            <a:avLst/>
-          </a:prstGeom>
-          <a:extLst>
-            <a:ext uri="{C572A759-6A51-4108-AA02-DFA0A04FC94B}">
-              <ma14:wrappingTextBoxFlag xmlns:ma14="http://schemas.microsoft.com/office/mac/drawingml/2011/main" val="0"/>
-            </a:ext>
-          </a:extLst>
-        </p:spPr>
-        <p:txBody>
-          <a:bodyPr/>
-          <a:lstStyle>
-            <a:lvl1pPr>
-              <a:defRPr sz="2000">
-                <a:solidFill>
-                  <a:srgbClr val="FFFFFF"/>
-                </a:solidFill>
-                <a:latin typeface="Calibri"/>
-                <a:ea typeface="Calibri"/>
-                <a:cs typeface="Calibri"/>
-              </a:defRPr>
-            </a:lvl1pPr>
-          </a:lstStyle>
-          <a:p>
-            <a:pPr algn="ctr"/>
-            <a:fld id="{F7021451-1387-4CA6-816F-3879F97B5CBC}" type="slidenum">
-              <a:rPr b="1" lang="en-US"/>
-              <a:t>47</a:t>
+              <a:t>49</a:t>
             </a:fld>
             <a:endParaRPr lang="en-US"/>
           </a:p>
@@ -19267,6 +20041,289 @@
             <a:fld id="{F7021451-1387-4CA6-816F-3879F97B5CBC}" type="slidenum">
               <a:rPr b="1" lang="en-US"/>
               <a:t>5</a:t>
+            </a:fld>
+            <a:endParaRPr lang="en-US"/>
+          </a:p>
+        </p:txBody>
+      </p:sp>
+    </p:spTree>
+  </p:cSld>
+  <p:clrMapOvr>
+    <a:masterClrMapping/>
+  </p:clrMapOvr>
+</p:sld>
+</file>
+
+<file path=ppt/slides/slide50.xml><?xml version="1.0" encoding="utf-8"?>
+<p:sld xmlns:a="http://schemas.openxmlformats.org/drawingml/2006/main" xmlns:r="http://schemas.openxmlformats.org/officeDocument/2006/relationships" xmlns:p="http://schemas.openxmlformats.org/presentationml/2006/main">
+  <p:cSld name="Slide 50">
+    <p:spTree>
+      <p:nvGrpSpPr>
+        <p:cNvPr id="1" name=""/>
+        <p:cNvGrpSpPr/>
+        <p:nvPr/>
+      </p:nvGrpSpPr>
+      <p:grpSpPr>
+        <a:xfrm>
+          <a:off x="0" y="0"/>
+          <a:ext cx="0" cy="0"/>
+          <a:chOff x="0" y="0"/>
+          <a:chExt cx="0" cy="0"/>
+        </a:xfrm>
+      </p:grpSpPr>
+      <p:sp>
+        <p:nvSpPr>
+          <p:cNvPr id="2" name="Text 0"/>
+          <p:cNvSpPr/>
+          <p:nvPr/>
+        </p:nvSpPr>
+        <p:spPr>
+          <a:xfrm>
+            <a:off x="457200" y="713232"/>
+            <a:ext cx="11368735" cy="274320"/>
+          </a:xfrm>
+          <a:prstGeom prst="rect">
+            <a:avLst/>
+          </a:prstGeom>
+          <a:noFill/>
+          <a:ln/>
+        </p:spPr>
+        <p:txBody>
+          <a:bodyPr wrap="square" lIns="0" tIns="0" rIns="0" bIns="0" rtlCol="0" anchor="ctr"/>
+          <a:lstStyle/>
+          <a:p>
+            <a:pPr algn="r" indent="0" marL="0">
+              <a:buNone/>
+            </a:pPr>
+            <a:r>
+              <a:rPr lang="en-US" sz="1400" b="1" dirty="0">
+                <a:solidFill>
+                  <a:srgbClr val="1C3F6E"/>
+                </a:solidFill>
+                <a:latin typeface="Calibri" pitchFamily="34" charset="0"/>
+                <a:ea typeface="Calibri" pitchFamily="34" charset="-122"/>
+                <a:cs typeface="Calibri" pitchFamily="34" charset="-120"/>
+              </a:rPr>
+              <a:t>REFERENCES</a:t>
+            </a:r>
+            <a:endParaRPr lang="en-US" sz="1400" dirty="0"/>
+          </a:p>
+        </p:txBody>
+      </p:sp>
+      <p:pic>
+        <p:nvPicPr>
+          <p:cNvPr id="3" name="Image 0" descr="/home/claude/f4/img/minesec_sheet.png">    </p:cNvPr>
+          <p:cNvPicPr>
+            <a:picLocks noChangeAspect="1"/>
+          </p:cNvPicPr>
+          <p:nvPr/>
+        </p:nvPicPr>
+        <p:blipFill>
+          <a:blip r:embed="rId1"/>
+          <a:stretch>
+            <a:fillRect/>
+          </a:stretch>
+        </p:blipFill>
+        <p:spPr>
+          <a:xfrm>
+            <a:off x="0" y="658368"/>
+            <a:ext cx="5120640" cy="5833872"/>
+          </a:xfrm>
+          <a:prstGeom prst="rect">
+            <a:avLst/>
+          </a:prstGeom>
+        </p:spPr>
+      </p:pic>
+      <p:sp>
+        <p:nvSpPr>
+          <p:cNvPr id="4" name="Text 1"/>
+          <p:cNvSpPr/>
+          <p:nvPr/>
+        </p:nvSpPr>
+        <p:spPr>
+          <a:xfrm>
+            <a:off x="5349240" y="1005840"/>
+            <a:ext cx="6522415" cy="731520"/>
+          </a:xfrm>
+          <a:prstGeom prst="rect">
+            <a:avLst/>
+          </a:prstGeom>
+          <a:noFill/>
+          <a:ln/>
+        </p:spPr>
+        <p:txBody>
+          <a:bodyPr wrap="square" lIns="0" tIns="0" rIns="0" bIns="0" rtlCol="0" anchor="ctr">
+            <a:normAutofit/>
+          </a:bodyPr>
+          <a:lstStyle/>
+          <a:p>
+            <a:pPr algn="ctr" indent="0" marL="0">
+              <a:buNone/>
+            </a:pPr>
+            <a:r>
+              <a:rPr lang="en-US" sz="3600" b="1" dirty="0">
+                <a:solidFill>
+                  <a:srgbClr val="990011"/>
+                </a:solidFill>
+                <a:latin typeface="Times New Roman" pitchFamily="34" charset="0"/>
+                <a:ea typeface="Times New Roman" pitchFamily="34" charset="-122"/>
+                <a:cs typeface="Times New Roman" pitchFamily="34" charset="-120"/>
+              </a:rPr>
+              <a:t>References</a:t>
+            </a:r>
+            <a:endParaRPr lang="en-US" sz="3600" dirty="0"/>
+          </a:p>
+        </p:txBody>
+      </p:sp>
+      <p:sp>
+        <p:nvSpPr>
+          <p:cNvPr id="5" name="Text 2"/>
+          <p:cNvSpPr/>
+          <p:nvPr/>
+        </p:nvSpPr>
+        <p:spPr>
+          <a:xfrm>
+            <a:off x="5349240" y="1783080"/>
+            <a:ext cx="6522415" cy="4663440"/>
+          </a:xfrm>
+          <a:prstGeom prst="rect">
+            <a:avLst/>
+          </a:prstGeom>
+          <a:noFill/>
+          <a:ln/>
+        </p:spPr>
+        <p:txBody>
+          <a:bodyPr wrap="square" lIns="0" tIns="0" rIns="0" bIns="0" rtlCol="0" anchor="t"/>
+          <a:lstStyle/>
+          <a:p>
+            <a:pPr algn="l" marL="342900" indent="-342900">
+              <a:spcAft>
+                <a:spcPts val="800"/>
+              </a:spcAft>
+              <a:buSzPct val="100000"/>
+              <a:buChar char="•"/>
+            </a:pPr>
+            <a:r>
+              <a:rPr lang="en-US" sz="1800" dirty="0">
+                <a:solidFill>
+                  <a:srgbClr val="111111"/>
+                </a:solidFill>
+                <a:latin typeface="Calibri" pitchFamily="34" charset="0"/>
+                <a:ea typeface="Calibri" pitchFamily="34" charset="-122"/>
+                <a:cs typeface="Calibri" pitchFamily="34" charset="-120"/>
+              </a:rPr>
+              <a:t>National Geography Syllabus (MINESEC), Form 4 — Module 3: Weather and Climate.</a:t>
+            </a:r>
+            <a:endParaRPr lang="en-US" sz="1800" dirty="0"/>
+          </a:p>
+          <a:p>
+            <a:pPr algn="l" marL="342900" indent="-342900">
+              <a:spcAft>
+                <a:spcPts val="800"/>
+              </a:spcAft>
+              <a:buSzPct val="100000"/>
+              <a:buChar char="•"/>
+            </a:pPr>
+            <a:r>
+              <a:rPr lang="en-US" sz="1800" dirty="0">
+                <a:solidFill>
+                  <a:srgbClr val="111111"/>
+                </a:solidFill>
+                <a:latin typeface="Calibri" pitchFamily="34" charset="0"/>
+                <a:ea typeface="Calibri" pitchFamily="34" charset="-122"/>
+                <a:cs typeface="Calibri" pitchFamily="34" charset="-120"/>
+              </a:rPr>
+              <a:t>Teacher's lesson notes (f4.docx), checked and corrected where necessary.</a:t>
+            </a:r>
+            <a:endParaRPr lang="en-US" sz="1800" dirty="0"/>
+          </a:p>
+          <a:p>
+            <a:pPr algn="l" marL="342900" indent="-342900">
+              <a:spcAft>
+                <a:spcPts val="800"/>
+              </a:spcAft>
+              <a:buSzPct val="100000"/>
+              <a:buChar char="•"/>
+            </a:pPr>
+            <a:r>
+              <a:rPr lang="en-US" sz="1800" dirty="0">
+                <a:solidFill>
+                  <a:srgbClr val="111111"/>
+                </a:solidFill>
+                <a:latin typeface="Calibri" pitchFamily="34" charset="0"/>
+                <a:ea typeface="Calibri" pitchFamily="34" charset="-122"/>
+                <a:cs typeface="Calibri" pitchFamily="34" charset="-120"/>
+              </a:rPr>
+              <a:t>Photo, Activity 2: “Parana River Floodplain, Northern Argentina (NASA, International Space” by NASA's Marshall Space Flight Center, CC BY-NC 2.0, via nasa (https://www.flickr.com/photos/28634332@N05/5684050889)</a:t>
+            </a:r>
+            <a:endParaRPr lang="en-US" sz="1800" dirty="0"/>
+          </a:p>
+          <a:p>
+            <a:pPr algn="l" marL="342900" indent="-342900">
+              <a:spcAft>
+                <a:spcPts val="800"/>
+              </a:spcAft>
+              <a:buSzPct val="100000"/>
+              <a:buChar char="•"/>
+            </a:pPr>
+            <a:r>
+              <a:rPr lang="en-US" sz="1800" dirty="0">
+                <a:solidFill>
+                  <a:srgbClr val="111111"/>
+                </a:solidFill>
+                <a:latin typeface="Calibri" pitchFamily="34" charset="0"/>
+                <a:ea typeface="Calibri" pitchFamily="34" charset="-122"/>
+                <a:cs typeface="Calibri" pitchFamily="34" charset="-120"/>
+              </a:rPr>
+              <a:t>Diagrams and animations: drawn for this lesson (Geography Department).</a:t>
+            </a:r>
+            <a:endParaRPr lang="en-US" sz="1800" dirty="0"/>
+          </a:p>
+        </p:txBody>
+      </p:sp>
+      <p:sp>
+        <p:nvSpPr>
+          <p:cNvPr id="25" name="Slide Number Placeholder 0"/>
+          <p:cNvSpPr>
+            <a:spLocks noGrp="1"/>
+          </p:cNvSpPr>
+          <p:nvPr>
+            <p:ph type="sldNum" sz="quarter" idx="4294967295"/>
+          </p:nvPr>
+        </p:nvSpPr>
+        <p:spPr>
+          <a:xfrm>
+            <a:off x="27432" y="91440"/>
+            <a:ext cx="585216" cy="475488"/>
+          </a:xfrm>
+          <a:prstGeom prst="rect">
+            <a:avLst/>
+          </a:prstGeom>
+          <a:extLst>
+            <a:ext uri="{C572A759-6A51-4108-AA02-DFA0A04FC94B}">
+              <ma14:wrappingTextBoxFlag xmlns:ma14="http://schemas.microsoft.com/office/mac/drawingml/2011/main" val="0"/>
+            </a:ext>
+          </a:extLst>
+        </p:spPr>
+        <p:txBody>
+          <a:bodyPr/>
+          <a:lstStyle>
+            <a:lvl1pPr>
+              <a:defRPr sz="2000">
+                <a:solidFill>
+                  <a:srgbClr val="FFFFFF"/>
+                </a:solidFill>
+                <a:latin typeface="Calibri"/>
+                <a:ea typeface="Calibri"/>
+                <a:cs typeface="Calibri"/>
+              </a:defRPr>
+            </a:lvl1pPr>
+          </a:lstStyle>
+          <a:p>
+            <a:pPr algn="ctr"/>
+            <a:fld id="{F7021451-1387-4CA6-816F-3879F97B5CBC}" type="slidenum">
+              <a:rPr b="1" lang="en-US"/>
+              <a:t>50</a:t>
             </a:fld>
             <a:endParaRPr lang="en-US"/>
           </a:p>

--- a/lecons/F3/43_FORM4_LESSON39_Hydrological_Cycle.pptx
+++ b/lecons/F3/43_FORM4_LESSON39_Hydrological_Cycle.pptx
@@ -3455,7 +3455,7 @@
           <a:p>
             <a:r>
               <a:rPr lang="en-US" dirty="0"/>
-              <a:t>Before we start the new lesson, let us correct the homework I gave you at the end of Lesson 38: Factors of Temperature. The question was: Put a little water in a bowl in the sun in the morning. In the evening, check how much water is left and write where you think the missing water went. Take out your exercise books.</a:t>
+              <a:t>Before we start the new lesson, let us correct the homework I gave you at the end of Lesson 38: Factors of Temperature. The question was: Name the four main stages of the water cycle. Take out your exercise books.</a:t>
             </a:r>
             <a:endParaRPr lang="en-US" dirty="0"/>
           </a:p>
@@ -3895,7 +3895,7 @@
           <a:p>
             <a:r>
               <a:rPr lang="en-US" dirty="0"/>
-              <a:t>For your homework: Ask your grandparents or an elder whether the dry season is hotter or longer today than when they were young. Write down what they say. We shall correct it at the beginning of our next lesson.</a:t>
+              <a:t>For your homework: Name two greenhouse gases. We shall correct it at the beginning of our next lesson.</a:t>
             </a:r>
             <a:endParaRPr lang="en-US" dirty="0"/>
           </a:p>
@@ -4423,7 +4423,7 @@
           <a:p>
             <a:r>
               <a:rPr lang="en-US" dirty="0"/>
-              <a:t>Here is a good answer. Some water is missing: it went into the air as water vapour. The Sun heated the water and it evaporated. Compare it with your own answer and correct your work in red.</a:t>
+              <a:t>Here is a good answer. Evaporation, condensation, precipitation and runoff. Compare it with your own answer and correct your work in red.</a:t>
             </a:r>
             <a:endParaRPr lang="en-US" dirty="0"/>
           </a:p>
@@ -14938,7 +14938,7 @@
         <p:spPr>
           <a:xfrm>
             <a:off x="0" y="658368"/>
-            <a:ext cx="3840480" cy="5833872"/>
+            <a:ext cx="5120640" cy="5833872"/>
           </a:xfrm>
           <a:prstGeom prst="rect">
             <a:avLst/>
@@ -14953,8 +14953,8 @@
         </p:nvSpPr>
         <p:spPr>
           <a:xfrm>
-            <a:off x="4069080" y="1005840"/>
-            <a:ext cx="7802575" cy="731520"/>
+            <a:off x="5349240" y="1005840"/>
+            <a:ext cx="6522415" cy="731520"/>
           </a:xfrm>
           <a:prstGeom prst="rect">
             <a:avLst/>
@@ -14994,8 +14994,8 @@
         </p:nvSpPr>
         <p:spPr>
           <a:xfrm>
-            <a:off x="4069080" y="1783080"/>
-            <a:ext cx="7802575" cy="4663440"/>
+            <a:off x="5349240" y="1783080"/>
+            <a:ext cx="6522415" cy="4663440"/>
           </a:xfrm>
           <a:prstGeom prst="rect">
             <a:avLst/>
@@ -15042,7 +15042,7 @@
                 <a:ea typeface="Times New Roman" pitchFamily="34" charset="-122"/>
                 <a:cs typeface="Times New Roman" pitchFamily="34" charset="-120"/>
               </a:rPr>
-              <a:t>Put a little water in a bowl in the sun in the morning. In the evening, check how much water is left and write where you think the missing water went.</a:t>
+              <a:t>Name the four main stages of the water cycle.</a:t>
             </a:r>
             <a:endParaRPr lang="en-US" sz="4000" dirty="0"/>
           </a:p>
@@ -16203,7 +16203,7 @@
                 <a:ea typeface="Times New Roman" pitchFamily="34" charset="-122"/>
                 <a:cs typeface="Times New Roman" pitchFamily="34" charset="-120"/>
               </a:rPr>
-              <a:t>Ask your grandparents or an elder whether the dry season is hotter or longer today than when they were young. Write down what they say.</a:t>
+              <a:t>Name two greenhouse gases.</a:t>
             </a:r>
             <a:endParaRPr lang="en-US" sz="4000" dirty="0"/>
           </a:p>
@@ -19143,7 +19143,7 @@
                           <a:ea typeface="Calibri" pitchFamily="34" charset="-122"/>
                           <a:cs typeface="Calibri" pitchFamily="34" charset="-120"/>
                         </a:rPr>
-                        <a:t>Ask your grandparents or an elder whether the dry season is hotter or longer today than when they were young. Write down what they say.</a:t>
+                        <a:t>Name two greenhouse gases.</a:t>
                       </a:r>
                       <a:endParaRPr lang="en-US" sz="1600" dirty="0">
                         <a:latin typeface="Calibri" charset="0"/>
@@ -19992,7 +19992,7 @@
                 <a:ea typeface="Times New Roman" pitchFamily="34" charset="-122"/>
                 <a:cs typeface="Times New Roman" pitchFamily="34" charset="-120"/>
               </a:rPr>
-              <a:t>Some water is missing: it went into the air as water vapour. The Sun heated the water and it evaporated.</a:t>
+              <a:t>Evaporation, condensation, precipitation and runoff.</a:t>
             </a:r>
             <a:endParaRPr lang="en-US" sz="4000" dirty="0"/>
           </a:p>
